--- a/extended_ibtracs.pptx
+++ b/extended_ibtracs.pptx
@@ -8,18 +8,19 @@
     <p:sldId id="256" r:id="rId2"/>
     <p:sldId id="257" r:id="rId3"/>
     <p:sldId id="267" r:id="rId4"/>
-    <p:sldId id="258" r:id="rId5"/>
-    <p:sldId id="259" r:id="rId6"/>
-    <p:sldId id="260" r:id="rId7"/>
-    <p:sldId id="261" r:id="rId8"/>
-    <p:sldId id="263" r:id="rId9"/>
-    <p:sldId id="264" r:id="rId10"/>
-    <p:sldId id="284" r:id="rId11"/>
-    <p:sldId id="286" r:id="rId12"/>
-    <p:sldId id="285" r:id="rId13"/>
-    <p:sldId id="266" r:id="rId14"/>
-    <p:sldId id="282" r:id="rId15"/>
-    <p:sldId id="283" r:id="rId16"/>
+    <p:sldId id="287" r:id="rId5"/>
+    <p:sldId id="258" r:id="rId6"/>
+    <p:sldId id="259" r:id="rId7"/>
+    <p:sldId id="260" r:id="rId8"/>
+    <p:sldId id="261" r:id="rId9"/>
+    <p:sldId id="263" r:id="rId10"/>
+    <p:sldId id="264" r:id="rId11"/>
+    <p:sldId id="284" r:id="rId12"/>
+    <p:sldId id="286" r:id="rId13"/>
+    <p:sldId id="285" r:id="rId14"/>
+    <p:sldId id="288" r:id="rId15"/>
+    <p:sldId id="282" r:id="rId16"/>
+    <p:sldId id="289" r:id="rId17"/>
   </p:sldIdLst>
   <p:sldSz cx="12192000" cy="6858000"/>
   <p:notesSz cx="6858000" cy="9144000"/>
@@ -129,7 +130,7 @@
 <file path=ppt/revisionInfo.xml><?xml version="1.0" encoding="utf-8"?>
 <p1510:revInfo xmlns:a="http://schemas.openxmlformats.org/drawingml/2006/main" xmlns:r="http://schemas.openxmlformats.org/officeDocument/2006/relationships" xmlns:p1510="http://schemas.microsoft.com/office/powerpoint/2015/10/main">
   <p1510:revLst>
-    <p1510:client id="{7C171365-9833-964A-BAC4-96C9B54AED94}" v="45" dt="2025-02-14T09:38:32.625"/>
+    <p1510:client id="{2DC4C814-A455-E948-BB6F-5ADBF75E2E21}" v="2" dt="2025-04-08T12:12:20.413"/>
   </p1510:revLst>
 </p1510:revInfo>
 </file>
@@ -465,22 +466,6 @@
           <pc:docMk/>
           <pc:sldMk cId="2284695307" sldId="268"/>
         </pc:sldMkLst>
-        <pc:spChg chg="mod">
-          <ac:chgData name="Stella Bourdin" userId="ab8cdc44-8769-45e4-b37b-63328535faf9" providerId="ADAL" clId="{7C171365-9833-964A-BAC4-96C9B54AED94}" dt="2025-02-14T09:15:48.174" v="388"/>
-          <ac:spMkLst>
-            <pc:docMk/>
-            <pc:sldMk cId="2284695307" sldId="268"/>
-            <ac:spMk id="4" creationId="{98FAEA4B-AF3F-C8E3-8477-4424FFD87DD6}"/>
-          </ac:spMkLst>
-        </pc:spChg>
-        <pc:spChg chg="mod">
-          <ac:chgData name="Stella Bourdin" userId="ab8cdc44-8769-45e4-b37b-63328535faf9" providerId="ADAL" clId="{7C171365-9833-964A-BAC4-96C9B54AED94}" dt="2025-02-14T09:15:48.279" v="393" actId="27636"/>
-          <ac:spMkLst>
-            <pc:docMk/>
-            <pc:sldMk cId="2284695307" sldId="268"/>
-            <ac:spMk id="5" creationId="{914119D9-BE3F-22B4-45E2-D43D0EED95AB}"/>
-          </ac:spMkLst>
-        </pc:spChg>
       </pc:sldChg>
       <pc:sldChg chg="modSp del">
         <pc:chgData name="Stella Bourdin" userId="ab8cdc44-8769-45e4-b37b-63328535faf9" providerId="ADAL" clId="{7C171365-9833-964A-BAC4-96C9B54AED94}" dt="2025-02-25T13:29:21.669" v="2142" actId="2696"/>
@@ -488,14 +473,6 @@
           <pc:docMk/>
           <pc:sldMk cId="2278624894" sldId="269"/>
         </pc:sldMkLst>
-        <pc:spChg chg="mod">
-          <ac:chgData name="Stella Bourdin" userId="ab8cdc44-8769-45e4-b37b-63328535faf9" providerId="ADAL" clId="{7C171365-9833-964A-BAC4-96C9B54AED94}" dt="2025-02-14T09:15:48.174" v="388"/>
-          <ac:spMkLst>
-            <pc:docMk/>
-            <pc:sldMk cId="2278624894" sldId="269"/>
-            <ac:spMk id="4" creationId="{85732823-7D00-B57F-04DC-A22A3C84F1E3}"/>
-          </ac:spMkLst>
-        </pc:spChg>
       </pc:sldChg>
       <pc:sldChg chg="modSp del">
         <pc:chgData name="Stella Bourdin" userId="ab8cdc44-8769-45e4-b37b-63328535faf9" providerId="ADAL" clId="{7C171365-9833-964A-BAC4-96C9B54AED94}" dt="2025-02-25T13:29:21.669" v="2142" actId="2696"/>
@@ -503,14 +480,6 @@
           <pc:docMk/>
           <pc:sldMk cId="2346823311" sldId="270"/>
         </pc:sldMkLst>
-        <pc:spChg chg="mod">
-          <ac:chgData name="Stella Bourdin" userId="ab8cdc44-8769-45e4-b37b-63328535faf9" providerId="ADAL" clId="{7C171365-9833-964A-BAC4-96C9B54AED94}" dt="2025-02-14T09:15:48.174" v="388"/>
-          <ac:spMkLst>
-            <pc:docMk/>
-            <pc:sldMk cId="2346823311" sldId="270"/>
-            <ac:spMk id="2" creationId="{582FDC90-2FBA-FBE6-5D1D-3ECE98EBFBC7}"/>
-          </ac:spMkLst>
-        </pc:spChg>
       </pc:sldChg>
       <pc:sldChg chg="modSp del">
         <pc:chgData name="Stella Bourdin" userId="ab8cdc44-8769-45e4-b37b-63328535faf9" providerId="ADAL" clId="{7C171365-9833-964A-BAC4-96C9B54AED94}" dt="2025-02-25T13:29:21.669" v="2142" actId="2696"/>
@@ -518,30 +487,6 @@
           <pc:docMk/>
           <pc:sldMk cId="1876413735" sldId="271"/>
         </pc:sldMkLst>
-        <pc:spChg chg="mod">
-          <ac:chgData name="Stella Bourdin" userId="ab8cdc44-8769-45e4-b37b-63328535faf9" providerId="ADAL" clId="{7C171365-9833-964A-BAC4-96C9B54AED94}" dt="2025-02-14T09:15:48.174" v="388"/>
-          <ac:spMkLst>
-            <pc:docMk/>
-            <pc:sldMk cId="1876413735" sldId="271"/>
-            <ac:spMk id="2" creationId="{4B10ED81-667F-56AB-F59D-5343C887ECB9}"/>
-          </ac:spMkLst>
-        </pc:spChg>
-        <pc:picChg chg="mod">
-          <ac:chgData name="Stella Bourdin" userId="ab8cdc44-8769-45e4-b37b-63328535faf9" providerId="ADAL" clId="{7C171365-9833-964A-BAC4-96C9B54AED94}" dt="2025-02-14T09:15:48.174" v="388"/>
-          <ac:picMkLst>
-            <pc:docMk/>
-            <pc:sldMk cId="1876413735" sldId="271"/>
-            <ac:picMk id="8193" creationId="{0F25B1E3-DAF1-F01F-07B2-E6DAFA854884}"/>
-          </ac:picMkLst>
-        </pc:picChg>
-        <pc:picChg chg="mod">
-          <ac:chgData name="Stella Bourdin" userId="ab8cdc44-8769-45e4-b37b-63328535faf9" providerId="ADAL" clId="{7C171365-9833-964A-BAC4-96C9B54AED94}" dt="2025-02-14T09:15:48.174" v="388"/>
-          <ac:picMkLst>
-            <pc:docMk/>
-            <pc:sldMk cId="1876413735" sldId="271"/>
-            <ac:picMk id="8194" creationId="{CD1BB722-050D-9431-DBF5-0087119BA9B7}"/>
-          </ac:picMkLst>
-        </pc:picChg>
       </pc:sldChg>
       <pc:sldChg chg="modSp del">
         <pc:chgData name="Stella Bourdin" userId="ab8cdc44-8769-45e4-b37b-63328535faf9" providerId="ADAL" clId="{7C171365-9833-964A-BAC4-96C9B54AED94}" dt="2025-02-25T13:29:21.669" v="2142" actId="2696"/>
@@ -549,30 +494,6 @@
           <pc:docMk/>
           <pc:sldMk cId="3243708500" sldId="272"/>
         </pc:sldMkLst>
-        <pc:spChg chg="mod">
-          <ac:chgData name="Stella Bourdin" userId="ab8cdc44-8769-45e4-b37b-63328535faf9" providerId="ADAL" clId="{7C171365-9833-964A-BAC4-96C9B54AED94}" dt="2025-02-14T09:15:48.174" v="388"/>
-          <ac:spMkLst>
-            <pc:docMk/>
-            <pc:sldMk cId="3243708500" sldId="272"/>
-            <ac:spMk id="2" creationId="{A18AD92E-046F-4F66-E640-0BD313C8F722}"/>
-          </ac:spMkLst>
-        </pc:spChg>
-        <pc:picChg chg="mod">
-          <ac:chgData name="Stella Bourdin" userId="ab8cdc44-8769-45e4-b37b-63328535faf9" providerId="ADAL" clId="{7C171365-9833-964A-BAC4-96C9B54AED94}" dt="2025-02-14T09:15:48.174" v="388"/>
-          <ac:picMkLst>
-            <pc:docMk/>
-            <pc:sldMk cId="3243708500" sldId="272"/>
-            <ac:picMk id="5" creationId="{5110BB68-60EA-3D9B-DD60-B055F7782B13}"/>
-          </ac:picMkLst>
-        </pc:picChg>
-        <pc:picChg chg="mod">
-          <ac:chgData name="Stella Bourdin" userId="ab8cdc44-8769-45e4-b37b-63328535faf9" providerId="ADAL" clId="{7C171365-9833-964A-BAC4-96C9B54AED94}" dt="2025-02-14T09:15:48.174" v="388"/>
-          <ac:picMkLst>
-            <pc:docMk/>
-            <pc:sldMk cId="3243708500" sldId="272"/>
-            <ac:picMk id="6" creationId="{DD17ABBC-0622-288F-93FF-86CD8B6E9833}"/>
-          </ac:picMkLst>
-        </pc:picChg>
       </pc:sldChg>
       <pc:sldChg chg="modSp del">
         <pc:chgData name="Stella Bourdin" userId="ab8cdc44-8769-45e4-b37b-63328535faf9" providerId="ADAL" clId="{7C171365-9833-964A-BAC4-96C9B54AED94}" dt="2025-02-25T13:29:21.669" v="2142" actId="2696"/>
@@ -580,22 +501,6 @@
           <pc:docMk/>
           <pc:sldMk cId="758056011" sldId="273"/>
         </pc:sldMkLst>
-        <pc:spChg chg="mod">
-          <ac:chgData name="Stella Bourdin" userId="ab8cdc44-8769-45e4-b37b-63328535faf9" providerId="ADAL" clId="{7C171365-9833-964A-BAC4-96C9B54AED94}" dt="2025-02-14T09:15:48.174" v="388"/>
-          <ac:spMkLst>
-            <pc:docMk/>
-            <pc:sldMk cId="758056011" sldId="273"/>
-            <ac:spMk id="5" creationId="{2FF49DB5-FAA0-E42D-D822-C85CBE237803}"/>
-          </ac:spMkLst>
-        </pc:spChg>
-        <pc:picChg chg="mod">
-          <ac:chgData name="Stella Bourdin" userId="ab8cdc44-8769-45e4-b37b-63328535faf9" providerId="ADAL" clId="{7C171365-9833-964A-BAC4-96C9B54AED94}" dt="2025-02-14T09:15:48.174" v="388"/>
-          <ac:picMkLst>
-            <pc:docMk/>
-            <pc:sldMk cId="758056011" sldId="273"/>
-            <ac:picMk id="7" creationId="{BC3888DE-D1AC-00CB-9978-BC77CD4A7D09}"/>
-          </ac:picMkLst>
-        </pc:picChg>
       </pc:sldChg>
       <pc:sldChg chg="modSp del">
         <pc:chgData name="Stella Bourdin" userId="ab8cdc44-8769-45e4-b37b-63328535faf9" providerId="ADAL" clId="{7C171365-9833-964A-BAC4-96C9B54AED94}" dt="2025-02-25T13:29:21.669" v="2142" actId="2696"/>
@@ -603,14 +508,6 @@
           <pc:docMk/>
           <pc:sldMk cId="2289796780" sldId="274"/>
         </pc:sldMkLst>
-        <pc:spChg chg="mod">
-          <ac:chgData name="Stella Bourdin" userId="ab8cdc44-8769-45e4-b37b-63328535faf9" providerId="ADAL" clId="{7C171365-9833-964A-BAC4-96C9B54AED94}" dt="2025-02-14T09:15:48.174" v="388"/>
-          <ac:spMkLst>
-            <pc:docMk/>
-            <pc:sldMk cId="2289796780" sldId="274"/>
-            <ac:spMk id="5" creationId="{FE009875-CD7F-8ADA-6D53-48F2E695873D}"/>
-          </ac:spMkLst>
-        </pc:spChg>
       </pc:sldChg>
       <pc:sldChg chg="modSp del">
         <pc:chgData name="Stella Bourdin" userId="ab8cdc44-8769-45e4-b37b-63328535faf9" providerId="ADAL" clId="{7C171365-9833-964A-BAC4-96C9B54AED94}" dt="2025-02-25T13:29:21.669" v="2142" actId="2696"/>
@@ -618,22 +515,6 @@
           <pc:docMk/>
           <pc:sldMk cId="3358200579" sldId="275"/>
         </pc:sldMkLst>
-        <pc:spChg chg="mod">
-          <ac:chgData name="Stella Bourdin" userId="ab8cdc44-8769-45e4-b37b-63328535faf9" providerId="ADAL" clId="{7C171365-9833-964A-BAC4-96C9B54AED94}" dt="2025-02-14T09:15:48.174" v="388"/>
-          <ac:spMkLst>
-            <pc:docMk/>
-            <pc:sldMk cId="3358200579" sldId="275"/>
-            <ac:spMk id="5" creationId="{AC8F0332-8255-23C6-FC1C-B924243BC1A4}"/>
-          </ac:spMkLst>
-        </pc:spChg>
-        <pc:picChg chg="mod">
-          <ac:chgData name="Stella Bourdin" userId="ab8cdc44-8769-45e4-b37b-63328535faf9" providerId="ADAL" clId="{7C171365-9833-964A-BAC4-96C9B54AED94}" dt="2025-02-14T09:15:48.174" v="388"/>
-          <ac:picMkLst>
-            <pc:docMk/>
-            <pc:sldMk cId="3358200579" sldId="275"/>
-            <ac:picMk id="8" creationId="{E2EFFD1C-17A2-8B75-A859-1156A2B4D988}"/>
-          </ac:picMkLst>
-        </pc:picChg>
       </pc:sldChg>
       <pc:sldChg chg="modSp del">
         <pc:chgData name="Stella Bourdin" userId="ab8cdc44-8769-45e4-b37b-63328535faf9" providerId="ADAL" clId="{7C171365-9833-964A-BAC4-96C9B54AED94}" dt="2025-02-25T13:29:21.669" v="2142" actId="2696"/>
@@ -641,14 +522,6 @@
           <pc:docMk/>
           <pc:sldMk cId="1166776304" sldId="276"/>
         </pc:sldMkLst>
-        <pc:spChg chg="mod">
-          <ac:chgData name="Stella Bourdin" userId="ab8cdc44-8769-45e4-b37b-63328535faf9" providerId="ADAL" clId="{7C171365-9833-964A-BAC4-96C9B54AED94}" dt="2025-02-14T09:15:48.174" v="388"/>
-          <ac:spMkLst>
-            <pc:docMk/>
-            <pc:sldMk cId="1166776304" sldId="276"/>
-            <ac:spMk id="2" creationId="{98384BF8-68D3-12C2-297F-9B086C2F5882}"/>
-          </ac:spMkLst>
-        </pc:spChg>
       </pc:sldChg>
       <pc:sldChg chg="modSp del">
         <pc:chgData name="Stella Bourdin" userId="ab8cdc44-8769-45e4-b37b-63328535faf9" providerId="ADAL" clId="{7C171365-9833-964A-BAC4-96C9B54AED94}" dt="2025-02-25T13:29:21.669" v="2142" actId="2696"/>
@@ -656,22 +529,6 @@
           <pc:docMk/>
           <pc:sldMk cId="2208356638" sldId="277"/>
         </pc:sldMkLst>
-        <pc:spChg chg="mod">
-          <ac:chgData name="Stella Bourdin" userId="ab8cdc44-8769-45e4-b37b-63328535faf9" providerId="ADAL" clId="{7C171365-9833-964A-BAC4-96C9B54AED94}" dt="2025-02-14T09:15:48.174" v="388"/>
-          <ac:spMkLst>
-            <pc:docMk/>
-            <pc:sldMk cId="2208356638" sldId="277"/>
-            <ac:spMk id="2" creationId="{D9B44B4D-A624-5621-D6D4-A658B3F87D76}"/>
-          </ac:spMkLst>
-        </pc:spChg>
-        <pc:picChg chg="mod">
-          <ac:chgData name="Stella Bourdin" userId="ab8cdc44-8769-45e4-b37b-63328535faf9" providerId="ADAL" clId="{7C171365-9833-964A-BAC4-96C9B54AED94}" dt="2025-02-14T09:15:48.174" v="388"/>
-          <ac:picMkLst>
-            <pc:docMk/>
-            <pc:sldMk cId="2208356638" sldId="277"/>
-            <ac:picMk id="5" creationId="{7E1EE8D6-B748-A901-A206-A3513C43059A}"/>
-          </ac:picMkLst>
-        </pc:picChg>
       </pc:sldChg>
       <pc:sldChg chg="modSp del">
         <pc:chgData name="Stella Bourdin" userId="ab8cdc44-8769-45e4-b37b-63328535faf9" providerId="ADAL" clId="{7C171365-9833-964A-BAC4-96C9B54AED94}" dt="2025-02-25T13:29:21.669" v="2142" actId="2696"/>
@@ -679,14 +536,6 @@
           <pc:docMk/>
           <pc:sldMk cId="1703357767" sldId="278"/>
         </pc:sldMkLst>
-        <pc:spChg chg="mod">
-          <ac:chgData name="Stella Bourdin" userId="ab8cdc44-8769-45e4-b37b-63328535faf9" providerId="ADAL" clId="{7C171365-9833-964A-BAC4-96C9B54AED94}" dt="2025-02-14T09:15:48.174" v="388"/>
-          <ac:spMkLst>
-            <pc:docMk/>
-            <pc:sldMk cId="1703357767" sldId="278"/>
-            <ac:spMk id="2" creationId="{A87ACB65-A1B0-62B2-9C60-708A6E9773E7}"/>
-          </ac:spMkLst>
-        </pc:spChg>
       </pc:sldChg>
       <pc:sldChg chg="modSp del">
         <pc:chgData name="Stella Bourdin" userId="ab8cdc44-8769-45e4-b37b-63328535faf9" providerId="ADAL" clId="{7C171365-9833-964A-BAC4-96C9B54AED94}" dt="2025-02-25T13:29:21.669" v="2142" actId="2696"/>
@@ -694,14 +543,6 @@
           <pc:docMk/>
           <pc:sldMk cId="2184030443" sldId="279"/>
         </pc:sldMkLst>
-        <pc:spChg chg="mod">
-          <ac:chgData name="Stella Bourdin" userId="ab8cdc44-8769-45e4-b37b-63328535faf9" providerId="ADAL" clId="{7C171365-9833-964A-BAC4-96C9B54AED94}" dt="2025-02-14T09:15:48.174" v="388"/>
-          <ac:spMkLst>
-            <pc:docMk/>
-            <pc:sldMk cId="2184030443" sldId="279"/>
-            <ac:spMk id="2" creationId="{086365BE-2790-6AA8-E38C-1E93AFF968BC}"/>
-          </ac:spMkLst>
-        </pc:spChg>
       </pc:sldChg>
       <pc:sldChg chg="modSp del">
         <pc:chgData name="Stella Bourdin" userId="ab8cdc44-8769-45e4-b37b-63328535faf9" providerId="ADAL" clId="{7C171365-9833-964A-BAC4-96C9B54AED94}" dt="2025-02-25T13:29:21.669" v="2142" actId="2696"/>
@@ -709,14 +550,6 @@
           <pc:docMk/>
           <pc:sldMk cId="2076233409" sldId="280"/>
         </pc:sldMkLst>
-        <pc:spChg chg="mod">
-          <ac:chgData name="Stella Bourdin" userId="ab8cdc44-8769-45e4-b37b-63328535faf9" providerId="ADAL" clId="{7C171365-9833-964A-BAC4-96C9B54AED94}" dt="2025-02-14T09:15:48.174" v="388"/>
-          <ac:spMkLst>
-            <pc:docMk/>
-            <pc:sldMk cId="2076233409" sldId="280"/>
-            <ac:spMk id="2" creationId="{55D022D6-2A4C-E514-E4B3-2A29DBF45BFE}"/>
-          </ac:spMkLst>
-        </pc:spChg>
       </pc:sldChg>
       <pc:sldChg chg="modSp del">
         <pc:chgData name="Stella Bourdin" userId="ab8cdc44-8769-45e4-b37b-63328535faf9" providerId="ADAL" clId="{7C171365-9833-964A-BAC4-96C9B54AED94}" dt="2025-02-25T13:29:21.669" v="2142" actId="2696"/>
@@ -724,22 +557,6 @@
           <pc:docMk/>
           <pc:sldMk cId="755240421" sldId="281"/>
         </pc:sldMkLst>
-        <pc:spChg chg="mod">
-          <ac:chgData name="Stella Bourdin" userId="ab8cdc44-8769-45e4-b37b-63328535faf9" providerId="ADAL" clId="{7C171365-9833-964A-BAC4-96C9B54AED94}" dt="2025-02-14T09:15:48.174" v="388"/>
-          <ac:spMkLst>
-            <pc:docMk/>
-            <pc:sldMk cId="755240421" sldId="281"/>
-            <ac:spMk id="2" creationId="{451D8492-7F49-1DB7-E0A9-5EDF94F70C0D}"/>
-          </ac:spMkLst>
-        </pc:spChg>
-        <pc:spChg chg="mod">
-          <ac:chgData name="Stella Bourdin" userId="ab8cdc44-8769-45e4-b37b-63328535faf9" providerId="ADAL" clId="{7C171365-9833-964A-BAC4-96C9B54AED94}" dt="2025-02-14T09:15:48.174" v="388"/>
-          <ac:spMkLst>
-            <pc:docMk/>
-            <pc:sldMk cId="755240421" sldId="281"/>
-            <ac:spMk id="3" creationId="{743473EC-F81D-A088-5FB6-1ABE579E335F}"/>
-          </ac:spMkLst>
-        </pc:spChg>
       </pc:sldChg>
       <pc:sldChg chg="addSp delSp modSp new mod">
         <pc:chgData name="Stella Bourdin" userId="ab8cdc44-8769-45e4-b37b-63328535faf9" providerId="ADAL" clId="{7C171365-9833-964A-BAC4-96C9B54AED94}" dt="2025-02-14T09:15:48.174" v="388"/>
@@ -901,6 +718,175 @@
             <pc:docMk/>
             <pc:sldMk cId="4094907165" sldId="286"/>
             <ac:picMk id="4" creationId="{811AC45E-BB33-2454-F02C-CCDA907DBA62}"/>
+          </ac:picMkLst>
+        </pc:picChg>
+      </pc:sldChg>
+    </pc:docChg>
+  </pc:docChgLst>
+  <pc:docChgLst>
+    <pc:chgData name="Stella Bourdin" userId="ab8cdc44-8769-45e4-b37b-63328535faf9" providerId="ADAL" clId="{2DC4C814-A455-E948-BB6F-5ADBF75E2E21}"/>
+    <pc:docChg chg="custSel addSld delSld modSld sldOrd">
+      <pc:chgData name="Stella Bourdin" userId="ab8cdc44-8769-45e4-b37b-63328535faf9" providerId="ADAL" clId="{2DC4C814-A455-E948-BB6F-5ADBF75E2E21}" dt="2025-04-08T12:14:20.557" v="401" actId="2696"/>
+      <pc:docMkLst>
+        <pc:docMk/>
+      </pc:docMkLst>
+      <pc:sldChg chg="del">
+        <pc:chgData name="Stella Bourdin" userId="ab8cdc44-8769-45e4-b37b-63328535faf9" providerId="ADAL" clId="{2DC4C814-A455-E948-BB6F-5ADBF75E2E21}" dt="2025-04-08T12:14:20.170" v="400" actId="2696"/>
+        <pc:sldMkLst>
+          <pc:docMk/>
+          <pc:sldMk cId="553517104" sldId="266"/>
+        </pc:sldMkLst>
+      </pc:sldChg>
+      <pc:sldChg chg="modSp mod ord">
+        <pc:chgData name="Stella Bourdin" userId="ab8cdc44-8769-45e4-b37b-63328535faf9" providerId="ADAL" clId="{2DC4C814-A455-E948-BB6F-5ADBF75E2E21}" dt="2025-04-08T12:11:03.939" v="289" actId="20577"/>
+        <pc:sldMkLst>
+          <pc:docMk/>
+          <pc:sldMk cId="4106318296" sldId="282"/>
+        </pc:sldMkLst>
+        <pc:spChg chg="mod">
+          <ac:chgData name="Stella Bourdin" userId="ab8cdc44-8769-45e4-b37b-63328535faf9" providerId="ADAL" clId="{2DC4C814-A455-E948-BB6F-5ADBF75E2E21}" dt="2025-04-08T12:11:03.939" v="289" actId="20577"/>
+          <ac:spMkLst>
+            <pc:docMk/>
+            <pc:sldMk cId="4106318296" sldId="282"/>
+            <ac:spMk id="2" creationId="{14A4459F-5A76-25DB-88AC-CBC8EEFA63FE}"/>
+          </ac:spMkLst>
+        </pc:spChg>
+      </pc:sldChg>
+      <pc:sldChg chg="del">
+        <pc:chgData name="Stella Bourdin" userId="ab8cdc44-8769-45e4-b37b-63328535faf9" providerId="ADAL" clId="{2DC4C814-A455-E948-BB6F-5ADBF75E2E21}" dt="2025-04-08T12:14:20.557" v="401" actId="2696"/>
+        <pc:sldMkLst>
+          <pc:docMk/>
+          <pc:sldMk cId="3117455170" sldId="283"/>
+        </pc:sldMkLst>
+      </pc:sldChg>
+      <pc:sldChg chg="modSp mod">
+        <pc:chgData name="Stella Bourdin" userId="ab8cdc44-8769-45e4-b37b-63328535faf9" providerId="ADAL" clId="{2DC4C814-A455-E948-BB6F-5ADBF75E2E21}" dt="2025-04-08T12:09:29.520" v="164" actId="20577"/>
+        <pc:sldMkLst>
+          <pc:docMk/>
+          <pc:sldMk cId="1292340892" sldId="284"/>
+        </pc:sldMkLst>
+        <pc:spChg chg="mod">
+          <ac:chgData name="Stella Bourdin" userId="ab8cdc44-8769-45e4-b37b-63328535faf9" providerId="ADAL" clId="{2DC4C814-A455-E948-BB6F-5ADBF75E2E21}" dt="2025-04-08T12:09:29.520" v="164" actId="20577"/>
+          <ac:spMkLst>
+            <pc:docMk/>
+            <pc:sldMk cId="1292340892" sldId="284"/>
+            <ac:spMk id="3" creationId="{58557595-DE33-6F9C-9005-7C1CADF7F271}"/>
+          </ac:spMkLst>
+        </pc:spChg>
+      </pc:sldChg>
+      <pc:sldChg chg="modSp mod">
+        <pc:chgData name="Stella Bourdin" userId="ab8cdc44-8769-45e4-b37b-63328535faf9" providerId="ADAL" clId="{2DC4C814-A455-E948-BB6F-5ADBF75E2E21}" dt="2025-04-08T12:10:02.961" v="242" actId="20577"/>
+        <pc:sldMkLst>
+          <pc:docMk/>
+          <pc:sldMk cId="3557695026" sldId="285"/>
+        </pc:sldMkLst>
+        <pc:spChg chg="mod">
+          <ac:chgData name="Stella Bourdin" userId="ab8cdc44-8769-45e4-b37b-63328535faf9" providerId="ADAL" clId="{2DC4C814-A455-E948-BB6F-5ADBF75E2E21}" dt="2025-04-08T12:10:02.961" v="242" actId="20577"/>
+          <ac:spMkLst>
+            <pc:docMk/>
+            <pc:sldMk cId="3557695026" sldId="285"/>
+            <ac:spMk id="3" creationId="{41AA2E57-3527-2887-4A09-25AD1B4B3C31}"/>
+          </ac:spMkLst>
+        </pc:spChg>
+      </pc:sldChg>
+      <pc:sldChg chg="modSp new mod">
+        <pc:chgData name="Stella Bourdin" userId="ab8cdc44-8769-45e4-b37b-63328535faf9" providerId="ADAL" clId="{2DC4C814-A455-E948-BB6F-5ADBF75E2E21}" dt="2025-04-08T12:07:47.021" v="71" actId="20577"/>
+        <pc:sldMkLst>
+          <pc:docMk/>
+          <pc:sldMk cId="1991708256" sldId="287"/>
+        </pc:sldMkLst>
+        <pc:spChg chg="mod">
+          <ac:chgData name="Stella Bourdin" userId="ab8cdc44-8769-45e4-b37b-63328535faf9" providerId="ADAL" clId="{2DC4C814-A455-E948-BB6F-5ADBF75E2E21}" dt="2025-04-08T12:07:42.305" v="63" actId="20577"/>
+          <ac:spMkLst>
+            <pc:docMk/>
+            <pc:sldMk cId="1991708256" sldId="287"/>
+            <ac:spMk id="2" creationId="{7C34E8F0-6980-E4CF-DA99-9EF8B956DDE7}"/>
+          </ac:spMkLst>
+        </pc:spChg>
+        <pc:spChg chg="mod">
+          <ac:chgData name="Stella Bourdin" userId="ab8cdc44-8769-45e4-b37b-63328535faf9" providerId="ADAL" clId="{2DC4C814-A455-E948-BB6F-5ADBF75E2E21}" dt="2025-04-08T12:07:47.021" v="71" actId="20577"/>
+          <ac:spMkLst>
+            <pc:docMk/>
+            <pc:sldMk cId="1991708256" sldId="287"/>
+            <ac:spMk id="3" creationId="{63639AE6-404C-3B7C-4214-6B120E1FF752}"/>
+          </ac:spMkLst>
+        </pc:spChg>
+      </pc:sldChg>
+      <pc:sldChg chg="modSp add mod">
+        <pc:chgData name="Stella Bourdin" userId="ab8cdc44-8769-45e4-b37b-63328535faf9" providerId="ADAL" clId="{2DC4C814-A455-E948-BB6F-5ADBF75E2E21}" dt="2025-04-08T12:08:17.365" v="137" actId="20577"/>
+        <pc:sldMkLst>
+          <pc:docMk/>
+          <pc:sldMk cId="1063802151" sldId="288"/>
+        </pc:sldMkLst>
+        <pc:spChg chg="mod">
+          <ac:chgData name="Stella Bourdin" userId="ab8cdc44-8769-45e4-b37b-63328535faf9" providerId="ADAL" clId="{2DC4C814-A455-E948-BB6F-5ADBF75E2E21}" dt="2025-04-08T12:08:06.823" v="97" actId="20577"/>
+          <ac:spMkLst>
+            <pc:docMk/>
+            <pc:sldMk cId="1063802151" sldId="288"/>
+            <ac:spMk id="2" creationId="{C57B0E8B-8806-74F2-5ED0-E9232FD22F91}"/>
+          </ac:spMkLst>
+        </pc:spChg>
+        <pc:spChg chg="mod">
+          <ac:chgData name="Stella Bourdin" userId="ab8cdc44-8769-45e4-b37b-63328535faf9" providerId="ADAL" clId="{2DC4C814-A455-E948-BB6F-5ADBF75E2E21}" dt="2025-04-08T12:08:17.365" v="137" actId="20577"/>
+          <ac:spMkLst>
+            <pc:docMk/>
+            <pc:sldMk cId="1063802151" sldId="288"/>
+            <ac:spMk id="3" creationId="{BB66A465-90EA-8140-3CA6-9CC4842A88AD}"/>
+          </ac:spMkLst>
+        </pc:spChg>
+      </pc:sldChg>
+      <pc:sldChg chg="addSp modSp new mod setBg setClrOvrMap">
+        <pc:chgData name="Stella Bourdin" userId="ab8cdc44-8769-45e4-b37b-63328535faf9" providerId="ADAL" clId="{2DC4C814-A455-E948-BB6F-5ADBF75E2E21}" dt="2025-04-08T12:12:30.291" v="399" actId="20577"/>
+        <pc:sldMkLst>
+          <pc:docMk/>
+          <pc:sldMk cId="92772833" sldId="289"/>
+        </pc:sldMkLst>
+        <pc:spChg chg="mod">
+          <ac:chgData name="Stella Bourdin" userId="ab8cdc44-8769-45e4-b37b-63328535faf9" providerId="ADAL" clId="{2DC4C814-A455-E948-BB6F-5ADBF75E2E21}" dt="2025-04-08T12:12:23.879" v="385" actId="26606"/>
+          <ac:spMkLst>
+            <pc:docMk/>
+            <pc:sldMk cId="92772833" sldId="289"/>
+            <ac:spMk id="2" creationId="{E736EF3C-9538-DD5C-3D4A-D851146A2624}"/>
+          </ac:spMkLst>
+        </pc:spChg>
+        <pc:spChg chg="mod">
+          <ac:chgData name="Stella Bourdin" userId="ab8cdc44-8769-45e4-b37b-63328535faf9" providerId="ADAL" clId="{2DC4C814-A455-E948-BB6F-5ADBF75E2E21}" dt="2025-04-08T12:12:30.291" v="399" actId="20577"/>
+          <ac:spMkLst>
+            <pc:docMk/>
+            <pc:sldMk cId="92772833" sldId="289"/>
+            <ac:spMk id="3" creationId="{A613B002-0064-97A2-C3E4-BD1952114BF4}"/>
+          </ac:spMkLst>
+        </pc:spChg>
+        <pc:spChg chg="add">
+          <ac:chgData name="Stella Bourdin" userId="ab8cdc44-8769-45e4-b37b-63328535faf9" providerId="ADAL" clId="{2DC4C814-A455-E948-BB6F-5ADBF75E2E21}" dt="2025-04-08T12:12:23.879" v="385" actId="26606"/>
+          <ac:spMkLst>
+            <pc:docMk/>
+            <pc:sldMk cId="92772833" sldId="289"/>
+            <ac:spMk id="9" creationId="{636F6DB7-CF8D-494A-82F6-13B58DCA9896}"/>
+          </ac:spMkLst>
+        </pc:spChg>
+        <pc:spChg chg="add">
+          <ac:chgData name="Stella Bourdin" userId="ab8cdc44-8769-45e4-b37b-63328535faf9" providerId="ADAL" clId="{2DC4C814-A455-E948-BB6F-5ADBF75E2E21}" dt="2025-04-08T12:12:23.879" v="385" actId="26606"/>
+          <ac:spMkLst>
+            <pc:docMk/>
+            <pc:sldMk cId="92772833" sldId="289"/>
+            <ac:spMk id="11" creationId="{0B7E5194-6E82-4A44-99C3-FE7D87F34134}"/>
+          </ac:spMkLst>
+        </pc:spChg>
+        <pc:grpChg chg="add">
+          <ac:chgData name="Stella Bourdin" userId="ab8cdc44-8769-45e4-b37b-63328535faf9" providerId="ADAL" clId="{2DC4C814-A455-E948-BB6F-5ADBF75E2E21}" dt="2025-04-08T12:12:23.879" v="385" actId="26606"/>
+          <ac:grpSpMkLst>
+            <pc:docMk/>
+            <pc:sldMk cId="92772833" sldId="289"/>
+            <ac:grpSpMk id="13" creationId="{49FCC1E1-84D3-494D-A0A0-286AFA1C3018}"/>
+          </ac:grpSpMkLst>
+        </pc:grpChg>
+        <pc:picChg chg="add mod">
+          <ac:chgData name="Stella Bourdin" userId="ab8cdc44-8769-45e4-b37b-63328535faf9" providerId="ADAL" clId="{2DC4C814-A455-E948-BB6F-5ADBF75E2E21}" dt="2025-04-08T12:12:23.879" v="385" actId="26606"/>
+          <ac:picMkLst>
+            <pc:docMk/>
+            <pc:sldMk cId="92772833" sldId="289"/>
+            <ac:picMk id="4" creationId="{7568F9B9-2AD6-F9C6-7308-B3757C19595C}"/>
           </ac:picMkLst>
         </pc:picChg>
       </pc:sldChg>
@@ -4521,7 +4507,7 @@
           <a:p>
             <a:fld id="{69F15558-3867-3A4A-86F4-4FA3E054EA2B}" type="datetimeFigureOut">
               <a:rPr lang="en-US" smtClean="0"/>
-              <a:t>2/25/25</a:t>
+              <a:t>4/8/25</a:t>
             </a:fld>
             <a:endParaRPr lang="en-US"/>
           </a:p>
@@ -4783,7 +4769,7 @@
           <a:p>
             <a:fld id="{69F15558-3867-3A4A-86F4-4FA3E054EA2B}" type="datetimeFigureOut">
               <a:rPr lang="en-US" smtClean="0"/>
-              <a:t>2/25/25</a:t>
+              <a:t>4/8/25</a:t>
             </a:fld>
             <a:endParaRPr lang="en-US"/>
           </a:p>
@@ -5018,7 +5004,7 @@
           <a:p>
             <a:fld id="{69F15558-3867-3A4A-86F4-4FA3E054EA2B}" type="datetimeFigureOut">
               <a:rPr lang="en-US" smtClean="0"/>
-              <a:t>2/25/25</a:t>
+              <a:t>4/8/25</a:t>
             </a:fld>
             <a:endParaRPr lang="en-US"/>
           </a:p>
@@ -5258,7 +5244,7 @@
           <a:p>
             <a:fld id="{69F15558-3867-3A4A-86F4-4FA3E054EA2B}" type="datetimeFigureOut">
               <a:rPr lang="en-US" smtClean="0"/>
-              <a:t>2/25/25</a:t>
+              <a:t>4/8/25</a:t>
             </a:fld>
             <a:endParaRPr lang="en-US"/>
           </a:p>
@@ -5565,7 +5551,7 @@
           <a:p>
             <a:fld id="{69F15558-3867-3A4A-86F4-4FA3E054EA2B}" type="datetimeFigureOut">
               <a:rPr lang="en-US" smtClean="0"/>
-              <a:t>2/25/25</a:t>
+              <a:t>4/8/25</a:t>
             </a:fld>
             <a:endParaRPr lang="en-US"/>
           </a:p>
@@ -5867,7 +5853,7 @@
           <a:p>
             <a:fld id="{69F15558-3867-3A4A-86F4-4FA3E054EA2B}" type="datetimeFigureOut">
               <a:rPr lang="en-US" smtClean="0"/>
-              <a:t>2/25/25</a:t>
+              <a:t>4/8/25</a:t>
             </a:fld>
             <a:endParaRPr lang="en-US"/>
           </a:p>
@@ -6289,7 +6275,7 @@
           <a:p>
             <a:fld id="{69F15558-3867-3A4A-86F4-4FA3E054EA2B}" type="datetimeFigureOut">
               <a:rPr lang="en-US" smtClean="0"/>
-              <a:t>2/25/25</a:t>
+              <a:t>4/8/25</a:t>
             </a:fld>
             <a:endParaRPr lang="en-US"/>
           </a:p>
@@ -6451,7 +6437,7 @@
           <a:p>
             <a:fld id="{69F15558-3867-3A4A-86F4-4FA3E054EA2B}" type="datetimeFigureOut">
               <a:rPr lang="en-US" smtClean="0"/>
-              <a:t>2/25/25</a:t>
+              <a:t>4/8/25</a:t>
             </a:fld>
             <a:endParaRPr lang="en-US"/>
           </a:p>
@@ -6546,7 +6532,7 @@
           <a:p>
             <a:fld id="{69F15558-3867-3A4A-86F4-4FA3E054EA2B}" type="datetimeFigureOut">
               <a:rPr lang="en-US" smtClean="0"/>
-              <a:t>2/25/25</a:t>
+              <a:t>4/8/25</a:t>
             </a:fld>
             <a:endParaRPr lang="en-US"/>
           </a:p>
@@ -6924,7 +6910,7 @@
           <a:p>
             <a:fld id="{69F15558-3867-3A4A-86F4-4FA3E054EA2B}" type="datetimeFigureOut">
               <a:rPr lang="en-US" smtClean="0"/>
-              <a:t>2/25/25</a:t>
+              <a:t>4/8/25</a:t>
             </a:fld>
             <a:endParaRPr lang="en-US"/>
           </a:p>
@@ -7213,7 +7199,7 @@
           <a:p>
             <a:fld id="{69F15558-3867-3A4A-86F4-4FA3E054EA2B}" type="datetimeFigureOut">
               <a:rPr lang="en-US" smtClean="0"/>
-              <a:t>2/25/25</a:t>
+              <a:t>4/8/25</a:t>
             </a:fld>
             <a:endParaRPr lang="en-US"/>
           </a:p>
@@ -7424,7 +7410,7 @@
           <a:p>
             <a:fld id="{69F15558-3867-3A4A-86F4-4FA3E054EA2B}" type="datetimeFigureOut">
               <a:rPr lang="en-US" smtClean="0"/>
-              <a:t>2/25/25</a:t>
+              <a:t>4/8/25</a:t>
             </a:fld>
             <a:endParaRPr lang="en-US"/>
           </a:p>
@@ -8116,6 +8102,509 @@
           <a:chExt cx="0" cy="0"/>
         </a:xfrm>
       </p:grpSpPr>
+      <p:pic>
+        <p:nvPicPr>
+          <p:cNvPr id="3" name="Picture 2">
+            <a:extLst>
+              <a:ext uri="{FF2B5EF4-FFF2-40B4-BE49-F238E27FC236}">
+                <a16:creationId xmlns:a16="http://schemas.microsoft.com/office/drawing/2014/main" id="{BF733BF0-81EB-B0F6-5348-9712EEF8CA00}"/>
+              </a:ext>
+            </a:extLst>
+          </p:cNvPr>
+          <p:cNvPicPr>
+            <a:picLocks noChangeAspect="1"/>
+          </p:cNvPicPr>
+          <p:nvPr/>
+        </p:nvPicPr>
+        <p:blipFill>
+          <a:blip r:embed="rId2"/>
+          <a:srcRect l="37255" t="20172" b="2646"/>
+          <a:stretch/>
+        </p:blipFill>
+        <p:spPr>
+          <a:xfrm>
+            <a:off x="4713666" y="664029"/>
+            <a:ext cx="7330604" cy="5828846"/>
+          </a:xfrm>
+          <a:prstGeom prst="rect">
+            <a:avLst/>
+          </a:prstGeom>
+        </p:spPr>
+      </p:pic>
+      <p:sp>
+        <p:nvSpPr>
+          <p:cNvPr id="2" name="Title 1">
+            <a:extLst>
+              <a:ext uri="{FF2B5EF4-FFF2-40B4-BE49-F238E27FC236}">
+                <a16:creationId xmlns:a16="http://schemas.microsoft.com/office/drawing/2014/main" id="{64D9DD38-64F3-E74E-0727-E0E15CB3E85D}"/>
+              </a:ext>
+            </a:extLst>
+          </p:cNvPr>
+          <p:cNvSpPr>
+            <a:spLocks noGrp="1"/>
+          </p:cNvSpPr>
+          <p:nvPr>
+            <p:ph type="title"/>
+          </p:nvPr>
+        </p:nvSpPr>
+        <p:spPr>
+          <a:xfrm>
+            <a:off x="838200" y="365125"/>
+            <a:ext cx="2928257" cy="1325563"/>
+          </a:xfrm>
+        </p:spPr>
+        <p:txBody>
+          <a:bodyPr/>
+          <a:lstStyle/>
+          <a:p>
+            <a:r>
+              <a:rPr lang="en-US" dirty="0"/>
+              <a:t>Example</a:t>
+            </a:r>
+          </a:p>
+        </p:txBody>
+      </p:sp>
+      <p:sp>
+        <p:nvSpPr>
+          <p:cNvPr id="5" name="TextBox 4">
+            <a:extLst>
+              <a:ext uri="{FF2B5EF4-FFF2-40B4-BE49-F238E27FC236}">
+                <a16:creationId xmlns:a16="http://schemas.microsoft.com/office/drawing/2014/main" id="{AE09DB65-1949-0733-B3E3-5DD7556C3AD0}"/>
+              </a:ext>
+            </a:extLst>
+          </p:cNvPr>
+          <p:cNvSpPr txBox="1"/>
+          <p:nvPr/>
+        </p:nvSpPr>
+        <p:spPr>
+          <a:xfrm>
+            <a:off x="5867400" y="27668"/>
+            <a:ext cx="5279572" cy="369332"/>
+          </a:xfrm>
+          <a:prstGeom prst="rect">
+            <a:avLst/>
+          </a:prstGeom>
+          <a:noFill/>
+        </p:spPr>
+        <p:txBody>
+          <a:bodyPr wrap="square" rtlCol="0">
+            <a:spAutoFit/>
+          </a:bodyPr>
+          <a:lstStyle/>
+          <a:p>
+            <a:r>
+              <a:rPr lang="en-US" dirty="0"/>
+              <a:t>1. Record represents time step in the track</a:t>
+            </a:r>
+          </a:p>
+        </p:txBody>
+      </p:sp>
+      <p:cxnSp>
+        <p:nvCxnSpPr>
+          <p:cNvPr id="7" name="Straight Arrow Connector 6">
+            <a:extLst>
+              <a:ext uri="{FF2B5EF4-FFF2-40B4-BE49-F238E27FC236}">
+                <a16:creationId xmlns:a16="http://schemas.microsoft.com/office/drawing/2014/main" id="{E4D8EB0D-BE8F-225D-B287-6EE02F0BCD54}"/>
+              </a:ext>
+            </a:extLst>
+          </p:cNvPr>
+          <p:cNvCxnSpPr/>
+          <p:nvPr/>
+        </p:nvCxnSpPr>
+        <p:spPr>
+          <a:xfrm flipH="1">
+            <a:off x="5225143" y="239486"/>
+            <a:ext cx="500743" cy="424543"/>
+          </a:xfrm>
+          <a:prstGeom prst="straightConnector1">
+            <a:avLst/>
+          </a:prstGeom>
+          <a:ln>
+            <a:tailEnd type="triangle"/>
+          </a:ln>
+        </p:spPr>
+        <p:style>
+          <a:lnRef idx="3">
+            <a:schemeClr val="accent2"/>
+          </a:lnRef>
+          <a:fillRef idx="0">
+            <a:schemeClr val="accent2"/>
+          </a:fillRef>
+          <a:effectRef idx="2">
+            <a:schemeClr val="accent2"/>
+          </a:effectRef>
+          <a:fontRef idx="minor">
+            <a:schemeClr val="tx1"/>
+          </a:fontRef>
+        </p:style>
+      </p:cxnSp>
+      <p:cxnSp>
+        <p:nvCxnSpPr>
+          <p:cNvPr id="8" name="Straight Arrow Connector 7">
+            <a:extLst>
+              <a:ext uri="{FF2B5EF4-FFF2-40B4-BE49-F238E27FC236}">
+                <a16:creationId xmlns:a16="http://schemas.microsoft.com/office/drawing/2014/main" id="{A71BE55D-6F3E-CDD6-377F-048ECD132C6C}"/>
+              </a:ext>
+            </a:extLst>
+          </p:cNvPr>
+          <p:cNvCxnSpPr>
+            <a:cxnSpLocks/>
+          </p:cNvCxnSpPr>
+          <p:nvPr/>
+        </p:nvCxnSpPr>
+        <p:spPr>
+          <a:xfrm>
+            <a:off x="10254953" y="245889"/>
+            <a:ext cx="666572" cy="376189"/>
+          </a:xfrm>
+          <a:prstGeom prst="straightConnector1">
+            <a:avLst/>
+          </a:prstGeom>
+          <a:ln>
+            <a:tailEnd type="triangle"/>
+          </a:ln>
+        </p:spPr>
+        <p:style>
+          <a:lnRef idx="3">
+            <a:schemeClr val="accent2"/>
+          </a:lnRef>
+          <a:fillRef idx="0">
+            <a:schemeClr val="accent2"/>
+          </a:fillRef>
+          <a:effectRef idx="2">
+            <a:schemeClr val="accent2"/>
+          </a:effectRef>
+          <a:fontRef idx="minor">
+            <a:schemeClr val="tx1"/>
+          </a:fontRef>
+        </p:style>
+      </p:cxnSp>
+      <p:sp>
+        <p:nvSpPr>
+          <p:cNvPr id="10" name="TextBox 9">
+            <a:extLst>
+              <a:ext uri="{FF2B5EF4-FFF2-40B4-BE49-F238E27FC236}">
+                <a16:creationId xmlns:a16="http://schemas.microsoft.com/office/drawing/2014/main" id="{C7639780-DA6D-ADA7-074D-994048E6D49B}"/>
+              </a:ext>
+            </a:extLst>
+          </p:cNvPr>
+          <p:cNvSpPr txBox="1"/>
+          <p:nvPr/>
+        </p:nvSpPr>
+        <p:spPr>
+          <a:xfrm>
+            <a:off x="82865" y="1740998"/>
+            <a:ext cx="3058682" cy="1200329"/>
+          </a:xfrm>
+          <a:prstGeom prst="rect">
+            <a:avLst/>
+          </a:prstGeom>
+          <a:noFill/>
+        </p:spPr>
+        <p:txBody>
+          <a:bodyPr wrap="square" rtlCol="0">
+            <a:spAutoFit/>
+          </a:bodyPr>
+          <a:lstStyle/>
+          <a:p>
+            <a:r>
+              <a:rPr lang="en-US" dirty="0"/>
+              <a:t>2. For a given record/time step, data is provided for each dataset that has a matching track at this time</a:t>
+            </a:r>
+          </a:p>
+        </p:txBody>
+      </p:sp>
+      <p:sp>
+        <p:nvSpPr>
+          <p:cNvPr id="12" name="Left Brace 11">
+            <a:extLst>
+              <a:ext uri="{FF2B5EF4-FFF2-40B4-BE49-F238E27FC236}">
+                <a16:creationId xmlns:a16="http://schemas.microsoft.com/office/drawing/2014/main" id="{804287AF-C171-7B92-2D05-488A8B10E3C0}"/>
+              </a:ext>
+            </a:extLst>
+          </p:cNvPr>
+          <p:cNvSpPr/>
+          <p:nvPr/>
+        </p:nvSpPr>
+        <p:spPr>
+          <a:xfrm>
+            <a:off x="4646369" y="1049898"/>
+            <a:ext cx="578774" cy="1401510"/>
+          </a:xfrm>
+          <a:prstGeom prst="leftBrace">
+            <a:avLst/>
+          </a:prstGeom>
+        </p:spPr>
+        <p:style>
+          <a:lnRef idx="3">
+            <a:schemeClr val="accent2"/>
+          </a:lnRef>
+          <a:fillRef idx="0">
+            <a:schemeClr val="accent2"/>
+          </a:fillRef>
+          <a:effectRef idx="2">
+            <a:schemeClr val="accent2"/>
+          </a:effectRef>
+          <a:fontRef idx="minor">
+            <a:schemeClr val="tx1"/>
+          </a:fontRef>
+        </p:style>
+        <p:txBody>
+          <a:bodyPr rtlCol="0" anchor="ctr"/>
+          <a:lstStyle/>
+          <a:p>
+            <a:pPr algn="ctr"/>
+            <a:endParaRPr lang="en-US"/>
+          </a:p>
+        </p:txBody>
+      </p:sp>
+      <p:sp>
+        <p:nvSpPr>
+          <p:cNvPr id="13" name="TextBox 12">
+            <a:extLst>
+              <a:ext uri="{FF2B5EF4-FFF2-40B4-BE49-F238E27FC236}">
+                <a16:creationId xmlns:a16="http://schemas.microsoft.com/office/drawing/2014/main" id="{A26CA58C-9AB4-75AC-4D65-466B4D1523C5}"/>
+              </a:ext>
+            </a:extLst>
+          </p:cNvPr>
+          <p:cNvSpPr txBox="1"/>
+          <p:nvPr/>
+        </p:nvSpPr>
+        <p:spPr>
+          <a:xfrm>
+            <a:off x="3492129" y="1489043"/>
+            <a:ext cx="1058660" cy="523220"/>
+          </a:xfrm>
+          <a:prstGeom prst="rect">
+            <a:avLst/>
+          </a:prstGeom>
+        </p:spPr>
+        <p:style>
+          <a:lnRef idx="2">
+            <a:schemeClr val="dk1"/>
+          </a:lnRef>
+          <a:fillRef idx="1">
+            <a:schemeClr val="lt1"/>
+          </a:fillRef>
+          <a:effectRef idx="0">
+            <a:schemeClr val="dk1"/>
+          </a:effectRef>
+          <a:fontRef idx="minor">
+            <a:schemeClr val="dk1"/>
+          </a:fontRef>
+        </p:style>
+        <p:txBody>
+          <a:bodyPr wrap="square" rtlCol="0">
+            <a:spAutoFit/>
+          </a:bodyPr>
+          <a:lstStyle/>
+          <a:p>
+            <a:pPr algn="r"/>
+            <a:r>
+              <a:rPr lang="en-US" sz="1400" dirty="0"/>
+              <a:t>Matching data</a:t>
+            </a:r>
+          </a:p>
+        </p:txBody>
+      </p:sp>
+      <p:cxnSp>
+        <p:nvCxnSpPr>
+          <p:cNvPr id="15" name="Straight Arrow Connector 14">
+            <a:extLst>
+              <a:ext uri="{FF2B5EF4-FFF2-40B4-BE49-F238E27FC236}">
+                <a16:creationId xmlns:a16="http://schemas.microsoft.com/office/drawing/2014/main" id="{F92F2BB4-266A-3C5D-E86B-B08F58A027EC}"/>
+              </a:ext>
+            </a:extLst>
+          </p:cNvPr>
+          <p:cNvCxnSpPr>
+            <a:cxnSpLocks/>
+          </p:cNvCxnSpPr>
+          <p:nvPr/>
+        </p:nvCxnSpPr>
+        <p:spPr>
+          <a:xfrm>
+            <a:off x="4616256" y="2713018"/>
+            <a:ext cx="608887" cy="0"/>
+          </a:xfrm>
+          <a:prstGeom prst="straightConnector1">
+            <a:avLst/>
+          </a:prstGeom>
+          <a:ln>
+            <a:tailEnd type="triangle"/>
+          </a:ln>
+        </p:spPr>
+        <p:style>
+          <a:lnRef idx="3">
+            <a:schemeClr val="accent2"/>
+          </a:lnRef>
+          <a:fillRef idx="0">
+            <a:schemeClr val="accent2"/>
+          </a:fillRef>
+          <a:effectRef idx="2">
+            <a:schemeClr val="accent2"/>
+          </a:effectRef>
+          <a:fontRef idx="minor">
+            <a:schemeClr val="tx1"/>
+          </a:fontRef>
+        </p:style>
+      </p:cxnSp>
+      <p:sp>
+        <p:nvSpPr>
+          <p:cNvPr id="18" name="TextBox 17">
+            <a:extLst>
+              <a:ext uri="{FF2B5EF4-FFF2-40B4-BE49-F238E27FC236}">
+                <a16:creationId xmlns:a16="http://schemas.microsoft.com/office/drawing/2014/main" id="{6290A05A-21D2-65A9-F5DB-080466994F23}"/>
+              </a:ext>
+            </a:extLst>
+          </p:cNvPr>
+          <p:cNvSpPr txBox="1"/>
+          <p:nvPr/>
+        </p:nvSpPr>
+        <p:spPr>
+          <a:xfrm>
+            <a:off x="2924671" y="2451408"/>
+            <a:ext cx="1673908" cy="523220"/>
+          </a:xfrm>
+          <a:prstGeom prst="rect">
+            <a:avLst/>
+          </a:prstGeom>
+        </p:spPr>
+        <p:style>
+          <a:lnRef idx="2">
+            <a:schemeClr val="dk1"/>
+          </a:lnRef>
+          <a:fillRef idx="1">
+            <a:schemeClr val="lt1"/>
+          </a:fillRef>
+          <a:effectRef idx="0">
+            <a:schemeClr val="dk1"/>
+          </a:effectRef>
+          <a:fontRef idx="minor">
+            <a:schemeClr val="dk1"/>
+          </a:fontRef>
+        </p:style>
+        <p:txBody>
+          <a:bodyPr wrap="square" rtlCol="0">
+            <a:spAutoFit/>
+          </a:bodyPr>
+          <a:lstStyle/>
+          <a:p>
+            <a:pPr algn="r"/>
+            <a:r>
+              <a:rPr lang="en-US" sz="1400" dirty="0"/>
+              <a:t>No match with this dataset at this time</a:t>
+            </a:r>
+          </a:p>
+        </p:txBody>
+      </p:sp>
+      <p:sp>
+        <p:nvSpPr>
+          <p:cNvPr id="19" name="TextBox 18">
+            <a:extLst>
+              <a:ext uri="{FF2B5EF4-FFF2-40B4-BE49-F238E27FC236}">
+                <a16:creationId xmlns:a16="http://schemas.microsoft.com/office/drawing/2014/main" id="{899AF722-0463-0F3E-C8C7-ADACC02295E6}"/>
+              </a:ext>
+            </a:extLst>
+          </p:cNvPr>
+          <p:cNvSpPr txBox="1"/>
+          <p:nvPr/>
+        </p:nvSpPr>
+        <p:spPr>
+          <a:xfrm>
+            <a:off x="82865" y="3266200"/>
+            <a:ext cx="3058682" cy="1477328"/>
+          </a:xfrm>
+          <a:prstGeom prst="rect">
+            <a:avLst/>
+          </a:prstGeom>
+          <a:noFill/>
+        </p:spPr>
+        <p:txBody>
+          <a:bodyPr wrap="square" rtlCol="0">
+            <a:spAutoFit/>
+          </a:bodyPr>
+          <a:lstStyle/>
+          <a:p>
+            <a:r>
+              <a:rPr lang="en-US" dirty="0"/>
+              <a:t>3. For matching points, longitude and latitude of the (re)analysis cyclone center (as defined by the tracker) is provided + intensity.</a:t>
+            </a:r>
+          </a:p>
+        </p:txBody>
+      </p:sp>
+      <p:sp>
+        <p:nvSpPr>
+          <p:cNvPr id="20" name="TextBox 19">
+            <a:extLst>
+              <a:ext uri="{FF2B5EF4-FFF2-40B4-BE49-F238E27FC236}">
+                <a16:creationId xmlns:a16="http://schemas.microsoft.com/office/drawing/2014/main" id="{082987CA-4F88-1963-F69C-7F7A1C3409B8}"/>
+              </a:ext>
+            </a:extLst>
+          </p:cNvPr>
+          <p:cNvSpPr txBox="1"/>
+          <p:nvPr/>
+        </p:nvSpPr>
+        <p:spPr>
+          <a:xfrm>
+            <a:off x="82865" y="5015547"/>
+            <a:ext cx="3058682" cy="1477328"/>
+          </a:xfrm>
+          <a:prstGeom prst="rect">
+            <a:avLst/>
+          </a:prstGeom>
+          <a:noFill/>
+        </p:spPr>
+        <p:txBody>
+          <a:bodyPr wrap="square" rtlCol="0">
+            <a:spAutoFit/>
+          </a:bodyPr>
+          <a:lstStyle/>
+          <a:p>
+            <a:r>
+              <a:rPr lang="en-US" dirty="0"/>
+              <a:t>NB: Some products only provided 6-hourly data while </a:t>
+            </a:r>
+            <a:r>
+              <a:rPr lang="en-US" dirty="0" err="1"/>
+              <a:t>IBTrACS</a:t>
+            </a:r>
+            <a:r>
+              <a:rPr lang="en-US" dirty="0"/>
+              <a:t> is 3-hourly, hence there might be “gaps” for a given (re)analysis track.</a:t>
+            </a:r>
+          </a:p>
+        </p:txBody>
+      </p:sp>
+    </p:spTree>
+    <p:extLst>
+      <p:ext uri="{BB962C8B-B14F-4D97-AF65-F5344CB8AC3E}">
+        <p14:creationId xmlns:p14="http://schemas.microsoft.com/office/powerpoint/2010/main" val="4108434403"/>
+      </p:ext>
+    </p:extLst>
+  </p:cSld>
+  <p:clrMapOvr>
+    <a:masterClrMapping/>
+  </p:clrMapOvr>
+</p:sld>
+</file>
+
+<file path=ppt/slides/slide11.xml><?xml version="1.0" encoding="utf-8"?>
+<p:sld xmlns:a="http://schemas.openxmlformats.org/drawingml/2006/main" xmlns:r="http://schemas.openxmlformats.org/officeDocument/2006/relationships" xmlns:p="http://schemas.openxmlformats.org/presentationml/2006/main">
+  <p:cSld>
+    <p:spTree>
+      <p:nvGrpSpPr>
+        <p:cNvPr id="1" name=""/>
+        <p:cNvGrpSpPr/>
+        <p:nvPr/>
+      </p:nvGrpSpPr>
+      <p:grpSpPr>
+        <a:xfrm>
+          <a:off x="0" y="0"/>
+          <a:ext cx="0" cy="0"/>
+          <a:chOff x="0" y="0"/>
+          <a:chExt cx="0" cy="0"/>
+        </a:xfrm>
+      </p:grpSpPr>
       <p:sp>
         <p:nvSpPr>
           <p:cNvPr id="2" name="Title 1">
@@ -8160,90 +8649,75 @@
             <p:ph idx="1"/>
           </p:nvPr>
         </p:nvSpPr>
-        <p:spPr/>
+        <p:spPr>
+          <a:xfrm>
+            <a:off x="581192" y="2180496"/>
+            <a:ext cx="11029615" cy="4287416"/>
+          </a:xfrm>
+        </p:spPr>
         <p:txBody>
-          <a:bodyPr/>
+          <a:bodyPr>
+            <a:normAutofit/>
+          </a:bodyPr>
           <a:lstStyle/>
           <a:p>
             <a:r>
-              <a:rPr lang="en-US" dirty="0"/>
+              <a:rPr lang="en-US" sz="2000" dirty="0"/>
               <a:t>Several additional attributes are provided:</a:t>
             </a:r>
           </a:p>
           <a:p>
             <a:pPr lvl="1"/>
             <a:r>
-              <a:rPr lang="en-US" dirty="0"/>
+              <a:rPr lang="en-US" sz="1800" dirty="0"/>
               <a:t>CPS parameters (from ERA5 and JRA3Q)</a:t>
             </a:r>
           </a:p>
           <a:p>
             <a:pPr lvl="1"/>
             <a:r>
-              <a:rPr lang="en-US" dirty="0"/>
+              <a:rPr lang="en-US" sz="1800" dirty="0"/>
               <a:t>Translation speed and direction</a:t>
             </a:r>
           </a:p>
           <a:p>
             <a:pPr lvl="1"/>
             <a:r>
-              <a:rPr lang="en-US" dirty="0" err="1"/>
+              <a:rPr lang="en-US" sz="1800" dirty="0" err="1"/>
               <a:t>IBTrACS</a:t>
             </a:r>
             <a:r>
-              <a:rPr lang="en-US" dirty="0"/>
+              <a:rPr lang="en-US" sz="1800" dirty="0"/>
               <a:t> attributes (such as “nature”, “</a:t>
             </a:r>
             <a:r>
-              <a:rPr lang="en-US" dirty="0" err="1"/>
+              <a:rPr lang="en-US" sz="1800" dirty="0" err="1"/>
               <a:t>sshs</a:t>
             </a:r>
             <a:r>
-              <a:rPr lang="en-US" dirty="0"/>
+              <a:rPr lang="en-US" sz="1800" dirty="0"/>
               <a:t>”, etc.)</a:t>
             </a:r>
           </a:p>
           <a:p>
             <a:pPr lvl="1"/>
             <a:r>
-              <a:rPr lang="en-US" dirty="0"/>
+              <a:rPr lang="en-US" sz="1800" dirty="0"/>
               <a:t>More can be added following the same template!</a:t>
             </a:r>
           </a:p>
           <a:p>
             <a:r>
-              <a:rPr lang="en-US" dirty="0"/>
+              <a:rPr lang="en-US" sz="2000" dirty="0"/>
               <a:t>It is also possible to add maps from a </a:t>
             </a:r>
             <a:r>
-              <a:rPr lang="en-US" dirty="0" err="1"/>
+              <a:rPr lang="en-US" sz="2000" dirty="0" err="1"/>
               <a:t>NetCDF</a:t>
             </a:r>
             <a:r>
-              <a:rPr lang="en-US" dirty="0"/>
-              <a:t> easily (upcoming)</a:t>
-            </a:r>
-          </a:p>
-          <a:p>
-            <a:r>
-              <a:rPr lang="en-US" dirty="0"/>
-              <a:t>It should be reasonably easy to add cyclone-centered snapshots using </a:t>
-            </a:r>
-            <a:r>
-              <a:rPr lang="en-US" dirty="0" err="1"/>
-              <a:t>TempestExtremes</a:t>
-            </a:r>
-            <a:r>
-              <a:rPr lang="en-US" dirty="0"/>
-              <a:t>’ </a:t>
-            </a:r>
-            <a:r>
-              <a:rPr lang="en-US" dirty="0" err="1"/>
-              <a:t>NodeFileCompose</a:t>
-            </a:r>
-            <a:r>
-              <a:rPr lang="en-US" dirty="0"/>
-              <a:t> (request if necessary)</a:t>
+              <a:rPr lang="en-US" sz="2000" dirty="0"/>
+              <a:t> easily (see script on GitHub)</a:t>
             </a:r>
           </a:p>
         </p:txBody>
@@ -8261,7 +8735,7 @@
 </p:sld>
 </file>
 
-<file path=ppt/slides/slide11.xml><?xml version="1.0" encoding="utf-8"?>
+<file path=ppt/slides/slide12.xml><?xml version="1.0" encoding="utf-8"?>
 <p:sld xmlns:a="http://schemas.openxmlformats.org/drawingml/2006/main" xmlns:r="http://schemas.openxmlformats.org/officeDocument/2006/relationships" xmlns:p="http://schemas.openxmlformats.org/presentationml/2006/main">
   <p:cSld>
     <p:spTree>
@@ -8462,162 +8936,6 @@
 </p:sld>
 </file>
 
-<file path=ppt/slides/slide12.xml><?xml version="1.0" encoding="utf-8"?>
-<p:sld xmlns:a="http://schemas.openxmlformats.org/drawingml/2006/main" xmlns:r="http://schemas.openxmlformats.org/officeDocument/2006/relationships" xmlns:p="http://schemas.openxmlformats.org/presentationml/2006/main">
-  <p:cSld>
-    <p:spTree>
-      <p:nvGrpSpPr>
-        <p:cNvPr id="1" name=""/>
-        <p:cNvGrpSpPr/>
-        <p:nvPr/>
-      </p:nvGrpSpPr>
-      <p:grpSpPr>
-        <a:xfrm>
-          <a:off x="0" y="0"/>
-          <a:ext cx="0" cy="0"/>
-          <a:chOff x="0" y="0"/>
-          <a:chExt cx="0" cy="0"/>
-        </a:xfrm>
-      </p:grpSpPr>
-      <p:sp>
-        <p:nvSpPr>
-          <p:cNvPr id="2" name="Title 1">
-            <a:extLst>
-              <a:ext uri="{FF2B5EF4-FFF2-40B4-BE49-F238E27FC236}">
-                <a16:creationId xmlns:a16="http://schemas.microsoft.com/office/drawing/2014/main" id="{0F8019A0-DFE5-9013-91BC-42940EB81FEF}"/>
-              </a:ext>
-            </a:extLst>
-          </p:cNvPr>
-          <p:cNvSpPr>
-            <a:spLocks noGrp="1"/>
-          </p:cNvSpPr>
-          <p:nvPr>
-            <p:ph type="title"/>
-          </p:nvPr>
-        </p:nvSpPr>
-        <p:spPr/>
-        <p:txBody>
-          <a:bodyPr/>
-          <a:lstStyle/>
-          <a:p>
-            <a:r>
-              <a:rPr lang="en-US" dirty="0"/>
-              <a:t>GitHub</a:t>
-            </a:r>
-          </a:p>
-        </p:txBody>
-      </p:sp>
-      <p:sp>
-        <p:nvSpPr>
-          <p:cNvPr id="3" name="Content Placeholder 2">
-            <a:extLst>
-              <a:ext uri="{FF2B5EF4-FFF2-40B4-BE49-F238E27FC236}">
-                <a16:creationId xmlns:a16="http://schemas.microsoft.com/office/drawing/2014/main" id="{41AA2E57-3527-2887-4A09-25AD1B4B3C31}"/>
-              </a:ext>
-            </a:extLst>
-          </p:cNvPr>
-          <p:cNvSpPr>
-            <a:spLocks noGrp="1"/>
-          </p:cNvSpPr>
-          <p:nvPr>
-            <p:ph idx="1"/>
-          </p:nvPr>
-        </p:nvSpPr>
-        <p:spPr/>
-        <p:txBody>
-          <a:bodyPr/>
-          <a:lstStyle/>
-          <a:p>
-            <a:r>
-              <a:rPr lang="en-US" dirty="0"/>
-              <a:t>In Huracan-Project GitHub: </a:t>
-            </a:r>
-            <a:r>
-              <a:rPr lang="en-US" dirty="0">
-                <a:hlinkClick r:id="rId2"/>
-              </a:rPr>
-              <a:t>https://github.com/Huracan-project/extended-ibtracs</a:t>
-            </a:r>
-            <a:r>
-              <a:rPr lang="en-US" dirty="0"/>
-              <a:t> </a:t>
-            </a:r>
-          </a:p>
-          <a:p>
-            <a:pPr lvl="1"/>
-            <a:r>
-              <a:rPr lang="en-US" dirty="0"/>
-              <a:t>Script to create minimal file</a:t>
-            </a:r>
-          </a:p>
-          <a:p>
-            <a:pPr lvl="1"/>
-            <a:r>
-              <a:rPr lang="en-US" dirty="0"/>
-              <a:t>Scripts to add attributes</a:t>
-            </a:r>
-          </a:p>
-          <a:p>
-            <a:pPr lvl="1"/>
-            <a:r>
-              <a:rPr lang="en-US" dirty="0"/>
-              <a:t>Scripts to visualize data</a:t>
-            </a:r>
-          </a:p>
-          <a:p>
-            <a:r>
-              <a:rPr lang="en-US" dirty="0"/>
-              <a:t>It is also easy to add maps from a </a:t>
-            </a:r>
-            <a:r>
-              <a:rPr lang="en-US" dirty="0" err="1"/>
-              <a:t>NetCDF</a:t>
-            </a:r>
-            <a:r>
-              <a:rPr lang="en-US" dirty="0"/>
-              <a:t> (script incoming)</a:t>
-            </a:r>
-          </a:p>
-          <a:p>
-            <a:r>
-              <a:rPr lang="en-US" dirty="0"/>
-              <a:t>With </a:t>
-            </a:r>
-            <a:r>
-              <a:rPr lang="en-US" dirty="0" err="1"/>
-              <a:t>TempestExtremes</a:t>
-            </a:r>
-            <a:r>
-              <a:rPr lang="en-US" dirty="0"/>
-              <a:t>’ </a:t>
-            </a:r>
-            <a:r>
-              <a:rPr lang="en-US" dirty="0" err="1"/>
-              <a:t>NodeFileCompose</a:t>
-            </a:r>
-            <a:r>
-              <a:rPr lang="en-US" dirty="0"/>
-              <a:t>, it would be reasonably easy to add cyclone-centered snapshots</a:t>
-            </a:r>
-          </a:p>
-          <a:p>
-            <a:endParaRPr lang="en-US" dirty="0"/>
-          </a:p>
-        </p:txBody>
-      </p:sp>
-    </p:spTree>
-    <p:extLst>
-      <p:ext uri="{BB962C8B-B14F-4D97-AF65-F5344CB8AC3E}">
-        <p14:creationId xmlns:p14="http://schemas.microsoft.com/office/powerpoint/2010/main" val="3557695026"/>
-      </p:ext>
-    </p:extLst>
-  </p:cSld>
-  <p:clrMapOvr>
-    <a:masterClrMapping/>
-  </p:clrMapOvr>
-</p:sld>
-</file>
-
 <file path=ppt/slides/slide13.xml><?xml version="1.0" encoding="utf-8"?>
 <p:sld xmlns:a="http://schemas.openxmlformats.org/drawingml/2006/main" xmlns:r="http://schemas.openxmlformats.org/officeDocument/2006/relationships" xmlns:p="http://schemas.openxmlformats.org/presentationml/2006/main">
   <p:cSld>
@@ -8640,7 +8958,7 @@
           <p:cNvPr id="2" name="Title 1">
             <a:extLst>
               <a:ext uri="{FF2B5EF4-FFF2-40B4-BE49-F238E27FC236}">
-                <a16:creationId xmlns:a16="http://schemas.microsoft.com/office/drawing/2014/main" id="{655B03EA-2F04-48B2-13D9-89AD8B888032}"/>
+                <a16:creationId xmlns:a16="http://schemas.microsoft.com/office/drawing/2014/main" id="{0F8019A0-DFE5-9013-91BC-42940EB81FEF}"/>
               </a:ext>
             </a:extLst>
           </p:cNvPr>
@@ -8658,7 +8976,7 @@
           <a:p>
             <a:r>
               <a:rPr lang="en-US" dirty="0"/>
-              <a:t>Perspectives</a:t>
+              <a:t>GitHub</a:t>
             </a:r>
           </a:p>
         </p:txBody>
@@ -8668,7 +8986,7 @@
           <p:cNvPr id="3" name="Content Placeholder 2">
             <a:extLst>
               <a:ext uri="{FF2B5EF4-FFF2-40B4-BE49-F238E27FC236}">
-                <a16:creationId xmlns:a16="http://schemas.microsoft.com/office/drawing/2014/main" id="{25AC9F18-CAC8-27EE-F805-255BF79F1FA0}"/>
+                <a16:creationId xmlns:a16="http://schemas.microsoft.com/office/drawing/2014/main" id="{41AA2E57-3527-2887-4A09-25AD1B4B3C31}"/>
               </a:ext>
             </a:extLst>
           </p:cNvPr>
@@ -8681,68 +8999,58 @@
         </p:nvSpPr>
         <p:spPr/>
         <p:txBody>
-          <a:bodyPr>
-            <a:normAutofit/>
-          </a:bodyPr>
+          <a:bodyPr/>
           <a:lstStyle/>
           <a:p>
             <a:r>
               <a:rPr lang="en-US" dirty="0"/>
-              <a:t>Potential for future?</a:t>
-            </a:r>
-          </a:p>
-          <a:p>
-            <a:pPr lvl="1"/>
-            <a:r>
-              <a:rPr lang="en-US" dirty="0"/>
-              <a:t>Add </a:t>
-            </a:r>
-            <a:r>
-              <a:rPr lang="en-US" dirty="0" err="1"/>
-              <a:t>WiTRACK</a:t>
-            </a:r>
-            <a:r>
-              <a:rPr lang="en-US" dirty="0"/>
-              <a:t> footprints?</a:t>
-            </a:r>
-          </a:p>
-          <a:p>
-            <a:pPr lvl="1"/>
-            <a:r>
-              <a:rPr lang="en-US" dirty="0" err="1"/>
-              <a:t>Precip</a:t>
+              <a:t>In Huracan-Project GitHub: </a:t>
+            </a:r>
+            <a:r>
+              <a:rPr lang="en-US" dirty="0">
+                <a:hlinkClick r:id="rId2"/>
+              </a:rPr>
+              <a:t>https://github.com/Huracan-project/extended-ibtracs</a:t>
             </a:r>
             <a:r>
               <a:rPr lang="en-US" dirty="0"/>
               <a:t> </a:t>
             </a:r>
+          </a:p>
+          <a:p>
+            <a:pPr lvl="1"/>
+            <a:r>
+              <a:rPr lang="en-US" dirty="0"/>
+              <a:t>Script to create minimal file</a:t>
+            </a:r>
+          </a:p>
+          <a:p>
+            <a:pPr lvl="1"/>
+            <a:r>
+              <a:rPr lang="en-US" dirty="0"/>
+              <a:t>Scripts to add attributes</a:t>
+            </a:r>
+          </a:p>
+          <a:p>
+            <a:pPr lvl="1"/>
+            <a:r>
+              <a:rPr lang="en-US" dirty="0"/>
+              <a:t>Scripts to visualize data</a:t>
+            </a:r>
+          </a:p>
+          <a:p>
+            <a:pPr lvl="1"/>
+            <a:r>
+              <a:rPr lang="en-US" dirty="0"/>
+              <a:t>Script to add fields from e.g. </a:t>
+            </a:r>
             <a:r>
               <a:rPr lang="en-US" dirty="0" err="1"/>
-              <a:t>obs</a:t>
+              <a:t>reanalyses</a:t>
             </a:r>
             <a:r>
               <a:rPr lang="en-US" dirty="0"/>
-              <a:t>?</a:t>
-            </a:r>
-          </a:p>
-          <a:p>
-            <a:pPr lvl="1"/>
-            <a:r>
-              <a:rPr lang="en-US" dirty="0"/>
-              <a:t>Storm surge data?</a:t>
-            </a:r>
-          </a:p>
-          <a:p>
-            <a:pPr lvl="1"/>
-            <a:r>
-              <a:rPr lang="en-US" dirty="0"/>
-              <a:t>Cyclone-centered snapshots</a:t>
-            </a:r>
-          </a:p>
-          <a:p>
-            <a:r>
-              <a:rPr lang="en-US" dirty="0"/>
-              <a:t>Let me know if you need something specific!</a:t>
+              <a:t> or observations</a:t>
             </a:r>
           </a:p>
         </p:txBody>
@@ -8750,7 +9058,7 @@
     </p:spTree>
     <p:extLst>
       <p:ext uri="{BB962C8B-B14F-4D97-AF65-F5344CB8AC3E}">
-        <p14:creationId xmlns:p14="http://schemas.microsoft.com/office/powerpoint/2010/main" val="553517104"/>
+        <p14:creationId xmlns:p14="http://schemas.microsoft.com/office/powerpoint/2010/main" val="3557695026"/>
       </p:ext>
     </p:extLst>
   </p:cSld>
@@ -8761,6 +9069,98 @@
 </file>
 
 <file path=ppt/slides/slide14.xml><?xml version="1.0" encoding="utf-8"?>
+<p:sld xmlns:a="http://schemas.openxmlformats.org/drawingml/2006/main" xmlns:r="http://schemas.openxmlformats.org/officeDocument/2006/relationships" xmlns:p="http://schemas.openxmlformats.org/presentationml/2006/main">
+  <p:cSld>
+    <p:spTree>
+      <p:nvGrpSpPr>
+        <p:cNvPr id="1" name="">
+          <a:extLst>
+            <a:ext uri="{FF2B5EF4-FFF2-40B4-BE49-F238E27FC236}">
+              <a16:creationId xmlns:a16="http://schemas.microsoft.com/office/drawing/2014/main" id="{0B0E4BF5-2865-C659-59CC-4548631FE0E5}"/>
+            </a:ext>
+          </a:extLst>
+        </p:cNvPr>
+        <p:cNvGrpSpPr/>
+        <p:nvPr/>
+      </p:nvGrpSpPr>
+      <p:grpSpPr>
+        <a:xfrm>
+          <a:off x="0" y="0"/>
+          <a:ext cx="0" cy="0"/>
+          <a:chOff x="0" y="0"/>
+          <a:chExt cx="0" cy="0"/>
+        </a:xfrm>
+      </p:grpSpPr>
+      <p:sp>
+        <p:nvSpPr>
+          <p:cNvPr id="2" name="Title 1">
+            <a:extLst>
+              <a:ext uri="{FF2B5EF4-FFF2-40B4-BE49-F238E27FC236}">
+                <a16:creationId xmlns:a16="http://schemas.microsoft.com/office/drawing/2014/main" id="{C57B0E8B-8806-74F2-5ED0-E9232FD22F91}"/>
+              </a:ext>
+            </a:extLst>
+          </p:cNvPr>
+          <p:cNvSpPr>
+            <a:spLocks noGrp="1"/>
+          </p:cNvSpPr>
+          <p:nvPr>
+            <p:ph type="title"/>
+          </p:nvPr>
+        </p:nvSpPr>
+        <p:spPr/>
+        <p:txBody>
+          <a:bodyPr/>
+          <a:lstStyle/>
+          <a:p>
+            <a:r>
+              <a:rPr lang="en-US" dirty="0"/>
+              <a:t>2. ASSOCIATING HAZARDS</a:t>
+            </a:r>
+          </a:p>
+        </p:txBody>
+      </p:sp>
+      <p:sp>
+        <p:nvSpPr>
+          <p:cNvPr id="3" name="Text Placeholder 2">
+            <a:extLst>
+              <a:ext uri="{FF2B5EF4-FFF2-40B4-BE49-F238E27FC236}">
+                <a16:creationId xmlns:a16="http://schemas.microsoft.com/office/drawing/2014/main" id="{BB66A465-90EA-8140-3CA6-9CC4842A88AD}"/>
+              </a:ext>
+            </a:extLst>
+          </p:cNvPr>
+          <p:cNvSpPr>
+            <a:spLocks noGrp="1"/>
+          </p:cNvSpPr>
+          <p:nvPr>
+            <p:ph type="body" idx="1"/>
+          </p:nvPr>
+        </p:nvSpPr>
+        <p:spPr/>
+        <p:txBody>
+          <a:bodyPr/>
+          <a:lstStyle/>
+          <a:p>
+            <a:r>
+              <a:rPr lang="en-US" dirty="0"/>
+              <a:t>Wind, Precipitation, Storm Surge</a:t>
+            </a:r>
+          </a:p>
+        </p:txBody>
+      </p:sp>
+    </p:spTree>
+    <p:extLst>
+      <p:ext uri="{BB962C8B-B14F-4D97-AF65-F5344CB8AC3E}">
+        <p14:creationId xmlns:p14="http://schemas.microsoft.com/office/powerpoint/2010/main" val="1063802151"/>
+      </p:ext>
+    </p:extLst>
+  </p:cSld>
+  <p:clrMapOvr>
+    <a:masterClrMapping/>
+  </p:clrMapOvr>
+</p:sld>
+</file>
+
+<file path=ppt/slides/slide15.xml><?xml version="1.0" encoding="utf-8"?>
 <p:sld xmlns:a="http://schemas.openxmlformats.org/drawingml/2006/main" xmlns:r="http://schemas.openxmlformats.org/officeDocument/2006/relationships" xmlns:p="http://schemas.openxmlformats.org/presentationml/2006/main">
   <p:cSld>
     <p:spTree>
@@ -8800,8 +9200,21 @@
           <a:p>
             <a:r>
               <a:rPr lang="en-US" dirty="0"/>
-              <a:t>Associating data</a:t>
-            </a:r>
+              <a:t>Done: Maps of WIND and </a:t>
+            </a:r>
+            <a:r>
+              <a:rPr lang="en-US" dirty="0" err="1"/>
+              <a:t>Precip</a:t>
+            </a:r>
+            <a:r>
+              <a:rPr lang="en-US" dirty="0"/>
+              <a:t> from E-</a:t>
+            </a:r>
+            <a:r>
+              <a:rPr lang="en-US" dirty="0" err="1"/>
+              <a:t>Obs</a:t>
+            </a:r>
+            <a:endParaRPr lang="en-US" dirty="0"/>
           </a:p>
         </p:txBody>
       </p:sp>
@@ -9000,9 +9413,17 @@
 </p:sld>
 </file>
 
-<file path=ppt/slides/slide15.xml><?xml version="1.0" encoding="utf-8"?>
+<file path=ppt/slides/slide16.xml><?xml version="1.0" encoding="utf-8"?>
 <p:sld xmlns:a="http://schemas.openxmlformats.org/drawingml/2006/main" xmlns:r="http://schemas.openxmlformats.org/officeDocument/2006/relationships" xmlns:p="http://schemas.openxmlformats.org/presentationml/2006/main">
   <p:cSld>
+    <p:bg>
+      <p:bgPr>
+        <a:solidFill>
+          <a:schemeClr val="bg1"/>
+        </a:solidFill>
+        <a:effectLst/>
+      </p:bgPr>
+    </p:bg>
     <p:spTree>
       <p:nvGrpSpPr>
         <p:cNvPr id="1" name=""/>
@@ -9019,10 +9440,134 @@
       </p:grpSpPr>
       <p:sp>
         <p:nvSpPr>
+          <p:cNvPr id="9" name="Rectangle 8">
+            <a:extLst>
+              <a:ext uri="{FF2B5EF4-FFF2-40B4-BE49-F238E27FC236}">
+                <a16:creationId xmlns:a16="http://schemas.microsoft.com/office/drawing/2014/main" id="{636F6DB7-CF8D-494A-82F6-13B58DCA9896}"/>
+              </a:ext>
+              <a:ext uri="{C183D7F6-B498-43B3-948B-1728B52AA6E4}">
+                <adec:decorative xmlns:adec="http://schemas.microsoft.com/office/drawing/2017/decorative" val="1"/>
+              </a:ext>
+            </a:extLst>
+          </p:cNvPr>
+          <p:cNvSpPr>
+            <a:spLocks noGrp="1" noRot="1" noChangeAspect="1" noMove="1" noResize="1" noEditPoints="1" noAdjustHandles="1" noChangeArrowheads="1" noChangeShapeType="1" noTextEdit="1"/>
+          </p:cNvSpPr>
+          <p:nvPr>
+            <p:extLst>
+              <p:ext uri="{386F3935-93C4-4BCD-93E2-E3B085C9AB24}">
+                <p16:designElem xmlns:p16="http://schemas.microsoft.com/office/powerpoint/2015/main" val="1"/>
+              </p:ext>
+            </p:extLst>
+          </p:nvPr>
+        </p:nvSpPr>
+        <p:spPr>
+          <a:xfrm>
+            <a:off x="0" y="0"/>
+            <a:ext cx="12192000" cy="6858000"/>
+          </a:xfrm>
+          <a:prstGeom prst="rect">
+            <a:avLst/>
+          </a:prstGeom>
+          <a:solidFill>
+            <a:schemeClr val="tx1"/>
+          </a:solidFill>
+          <a:ln>
+            <a:noFill/>
+          </a:ln>
+        </p:spPr>
+        <p:style>
+          <a:lnRef idx="2">
+            <a:schemeClr val="accent1">
+              <a:shade val="50000"/>
+            </a:schemeClr>
+          </a:lnRef>
+          <a:fillRef idx="1">
+            <a:schemeClr val="accent1"/>
+          </a:fillRef>
+          <a:effectRef idx="0">
+            <a:schemeClr val="accent1"/>
+          </a:effectRef>
+          <a:fontRef idx="minor">
+            <a:schemeClr val="lt1"/>
+          </a:fontRef>
+        </p:style>
+        <p:txBody>
+          <a:bodyPr rtlCol="0" anchor="ctr"/>
+          <a:lstStyle/>
+          <a:p>
+            <a:pPr algn="ctr"/>
+            <a:endParaRPr lang="en-US"/>
+          </a:p>
+        </p:txBody>
+      </p:sp>
+      <p:sp>
+        <p:nvSpPr>
+          <p:cNvPr id="11" name="Rectangle 10">
+            <a:extLst>
+              <a:ext uri="{FF2B5EF4-FFF2-40B4-BE49-F238E27FC236}">
+                <a16:creationId xmlns:a16="http://schemas.microsoft.com/office/drawing/2014/main" id="{0B7E5194-6E82-4A44-99C3-FE7D87F34134}"/>
+              </a:ext>
+              <a:ext uri="{C183D7F6-B498-43B3-948B-1728B52AA6E4}">
+                <adec:decorative xmlns:adec="http://schemas.microsoft.com/office/drawing/2017/decorative" val="1"/>
+              </a:ext>
+            </a:extLst>
+          </p:cNvPr>
+          <p:cNvSpPr>
+            <a:spLocks noGrp="1" noRot="1" noChangeAspect="1" noMove="1" noResize="1" noEditPoints="1" noAdjustHandles="1" noChangeArrowheads="1" noChangeShapeType="1" noTextEdit="1"/>
+          </p:cNvSpPr>
+          <p:nvPr>
+            <p:extLst>
+              <p:ext uri="{386F3935-93C4-4BCD-93E2-E3B085C9AB24}">
+                <p16:designElem xmlns:p16="http://schemas.microsoft.com/office/powerpoint/2015/main" val="1"/>
+              </p:ext>
+            </p:extLst>
+          </p:nvPr>
+        </p:nvSpPr>
+        <p:spPr>
+          <a:xfrm>
+            <a:off x="442377" y="614407"/>
+            <a:ext cx="3707477" cy="5611772"/>
+          </a:xfrm>
+          <a:prstGeom prst="rect">
+            <a:avLst/>
+          </a:prstGeom>
+          <a:solidFill>
+            <a:schemeClr val="accent1"/>
+          </a:solidFill>
+          <a:ln>
+            <a:noFill/>
+          </a:ln>
+          <a:effectLst/>
+        </p:spPr>
+        <p:style>
+          <a:lnRef idx="1">
+            <a:schemeClr val="accent1"/>
+          </a:lnRef>
+          <a:fillRef idx="3">
+            <a:schemeClr val="accent1"/>
+          </a:fillRef>
+          <a:effectRef idx="2">
+            <a:schemeClr val="accent1"/>
+          </a:effectRef>
+          <a:fontRef idx="minor">
+            <a:schemeClr val="lt1"/>
+          </a:fontRef>
+        </p:style>
+        <p:txBody>
+          <a:bodyPr/>
+          <a:lstStyle/>
+          <a:p>
+            <a:endParaRPr lang="en-US"/>
+          </a:p>
+        </p:txBody>
+      </p:sp>
+      <p:sp>
+        <p:nvSpPr>
           <p:cNvPr id="2" name="Title 1">
             <a:extLst>
               <a:ext uri="{FF2B5EF4-FFF2-40B4-BE49-F238E27FC236}">
-                <a16:creationId xmlns:a16="http://schemas.microsoft.com/office/drawing/2014/main" id="{D7CDCBF2-BBF7-693F-A6D4-DE3E9FA3608A}"/>
+                <a16:creationId xmlns:a16="http://schemas.microsoft.com/office/drawing/2014/main" id="{E736EF3C-9538-DD5C-3D4A-D851146A2624}"/>
               </a:ext>
             </a:extLst>
           </p:cNvPr>
@@ -9033,21 +9578,244 @@
             <p:ph type="title"/>
           </p:nvPr>
         </p:nvSpPr>
-        <p:spPr/>
+        <p:spPr>
+          <a:xfrm>
+            <a:off x="764110" y="826346"/>
+            <a:ext cx="3171905" cy="1013800"/>
+          </a:xfrm>
+        </p:spPr>
         <p:txBody>
-          <a:bodyPr/>
+          <a:bodyPr>
+            <a:normAutofit/>
+          </a:bodyPr>
           <a:lstStyle/>
           <a:p>
-            <a:endParaRPr lang="en-US"/>
+            <a:r>
+              <a:rPr lang="en-US" sz="2400">
+                <a:solidFill>
+                  <a:srgbClr val="FFFFFF"/>
+                </a:solidFill>
+              </a:rPr>
+              <a:t>Soon</a:t>
+            </a:r>
           </a:p>
         </p:txBody>
       </p:sp>
+      <p:grpSp>
+        <p:nvGrpSpPr>
+          <p:cNvPr id="13" name="Group 12">
+            <a:extLst>
+              <a:ext uri="{FF2B5EF4-FFF2-40B4-BE49-F238E27FC236}">
+                <a16:creationId xmlns:a16="http://schemas.microsoft.com/office/drawing/2014/main" id="{49FCC1E1-84D3-494D-A0A0-286AFA1C3018}"/>
+              </a:ext>
+              <a:ext uri="{C183D7F6-B498-43B3-948B-1728B52AA6E4}">
+                <adec:decorative xmlns:adec="http://schemas.microsoft.com/office/drawing/2017/decorative" val="1"/>
+              </a:ext>
+            </a:extLst>
+          </p:cNvPr>
+          <p:cNvGrpSpPr>
+            <a:grpSpLocks noGrp="1" noUngrp="1" noRot="1" noChangeAspect="1" noMove="1" noResize="1"/>
+          </p:cNvGrpSpPr>
+          <p:nvPr>
+            <p:extLst>
+              <p:ext uri="{386F3935-93C4-4BCD-93E2-E3B085C9AB24}">
+                <p16:designElem xmlns:p16="http://schemas.microsoft.com/office/powerpoint/2015/main" val="1"/>
+              </p:ext>
+            </p:extLst>
+          </p:nvPr>
+        </p:nvGrpSpPr>
+        <p:grpSpPr>
+          <a:xfrm>
+            <a:off x="446534" y="453643"/>
+            <a:ext cx="11298933" cy="98554"/>
+            <a:chOff x="446534" y="453643"/>
+            <a:chExt cx="11298933" cy="98554"/>
+          </a:xfrm>
+        </p:grpSpPr>
+        <p:sp>
+          <p:nvSpPr>
+            <p:cNvPr id="14" name="Rectangle 13">
+              <a:extLst>
+                <a:ext uri="{FF2B5EF4-FFF2-40B4-BE49-F238E27FC236}">
+                  <a16:creationId xmlns:a16="http://schemas.microsoft.com/office/drawing/2014/main" id="{96E09E90-FF79-402E-AF01-97A279BEADAD}"/>
+                </a:ext>
+                <a:ext uri="{C183D7F6-B498-43B3-948B-1728B52AA6E4}">
+                  <adec:decorative xmlns:adec="http://schemas.microsoft.com/office/drawing/2017/decorative" val="1"/>
+                </a:ext>
+              </a:extLst>
+            </p:cNvPr>
+            <p:cNvSpPr/>
+            <p:nvPr>
+              <p:extLst>
+                <p:ext uri="{386F3935-93C4-4BCD-93E2-E3B085C9AB24}">
+                  <p16:designElem xmlns:p16="http://schemas.microsoft.com/office/powerpoint/2015/main" val="1"/>
+                </p:ext>
+              </p:extLst>
+            </p:nvPr>
+          </p:nvSpPr>
+          <p:spPr>
+            <a:xfrm>
+              <a:off x="446534" y="457200"/>
+              <a:ext cx="3703320" cy="94997"/>
+            </a:xfrm>
+            <a:prstGeom prst="rect">
+              <a:avLst/>
+            </a:prstGeom>
+            <a:solidFill>
+              <a:schemeClr val="accent1"/>
+            </a:solidFill>
+            <a:ln>
+              <a:noFill/>
+            </a:ln>
+            <a:effectLst/>
+          </p:spPr>
+          <p:style>
+            <a:lnRef idx="1">
+              <a:schemeClr val="accent1"/>
+            </a:lnRef>
+            <a:fillRef idx="3">
+              <a:schemeClr val="accent1"/>
+            </a:fillRef>
+            <a:effectRef idx="2">
+              <a:schemeClr val="accent1"/>
+            </a:effectRef>
+            <a:fontRef idx="minor">
+              <a:schemeClr val="lt1"/>
+            </a:fontRef>
+          </p:style>
+          <p:txBody>
+            <a:bodyPr/>
+            <a:lstStyle/>
+            <a:p>
+              <a:endParaRPr lang="en-US"/>
+            </a:p>
+          </p:txBody>
+        </p:sp>
+        <p:sp>
+          <p:nvSpPr>
+            <p:cNvPr id="15" name="Rectangle 14">
+              <a:extLst>
+                <a:ext uri="{FF2B5EF4-FFF2-40B4-BE49-F238E27FC236}">
+                  <a16:creationId xmlns:a16="http://schemas.microsoft.com/office/drawing/2014/main" id="{EC6946F8-4B9B-4C51-9F51-2DB377392CC1}"/>
+                </a:ext>
+                <a:ext uri="{C183D7F6-B498-43B3-948B-1728B52AA6E4}">
+                  <adec:decorative xmlns:adec="http://schemas.microsoft.com/office/drawing/2017/decorative" val="1"/>
+                </a:ext>
+              </a:extLst>
+            </p:cNvPr>
+            <p:cNvSpPr/>
+            <p:nvPr>
+              <p:extLst>
+                <p:ext uri="{386F3935-93C4-4BCD-93E2-E3B085C9AB24}">
+                  <p16:designElem xmlns:p16="http://schemas.microsoft.com/office/powerpoint/2015/main" val="1"/>
+                </p:ext>
+              </p:extLst>
+            </p:nvPr>
+          </p:nvSpPr>
+          <p:spPr>
+            <a:xfrm>
+              <a:off x="8042147" y="453643"/>
+              <a:ext cx="3703320" cy="98554"/>
+            </a:xfrm>
+            <a:prstGeom prst="rect">
+              <a:avLst/>
+            </a:prstGeom>
+            <a:solidFill>
+              <a:schemeClr val="accent4"/>
+            </a:solidFill>
+            <a:ln>
+              <a:noFill/>
+            </a:ln>
+            <a:effectLst/>
+          </p:spPr>
+          <p:style>
+            <a:lnRef idx="1">
+              <a:schemeClr val="accent1"/>
+            </a:lnRef>
+            <a:fillRef idx="3">
+              <a:schemeClr val="accent1"/>
+            </a:fillRef>
+            <a:effectRef idx="2">
+              <a:schemeClr val="accent1"/>
+            </a:effectRef>
+            <a:fontRef idx="minor">
+              <a:schemeClr val="lt1"/>
+            </a:fontRef>
+          </p:style>
+          <p:txBody>
+            <a:bodyPr/>
+            <a:lstStyle/>
+            <a:p>
+              <a:endParaRPr lang="en-US"/>
+            </a:p>
+          </p:txBody>
+        </p:sp>
+        <p:sp>
+          <p:nvSpPr>
+            <p:cNvPr id="16" name="Rectangle 15">
+              <a:extLst>
+                <a:ext uri="{FF2B5EF4-FFF2-40B4-BE49-F238E27FC236}">
+                  <a16:creationId xmlns:a16="http://schemas.microsoft.com/office/drawing/2014/main" id="{7B3D2B3D-A285-438C-A344-AED3E46A0782}"/>
+                </a:ext>
+                <a:ext uri="{C183D7F6-B498-43B3-948B-1728B52AA6E4}">
+                  <adec:decorative xmlns:adec="http://schemas.microsoft.com/office/drawing/2017/decorative" val="1"/>
+                </a:ext>
+              </a:extLst>
+            </p:cNvPr>
+            <p:cNvSpPr/>
+            <p:nvPr>
+              <p:extLst>
+                <p:ext uri="{386F3935-93C4-4BCD-93E2-E3B085C9AB24}">
+                  <p16:designElem xmlns:p16="http://schemas.microsoft.com/office/powerpoint/2015/main" val="1"/>
+                </p:ext>
+              </p:extLst>
+            </p:nvPr>
+          </p:nvSpPr>
+          <p:spPr>
+            <a:xfrm>
+              <a:off x="4241830" y="457200"/>
+              <a:ext cx="3703320" cy="91440"/>
+            </a:xfrm>
+            <a:prstGeom prst="rect">
+              <a:avLst/>
+            </a:prstGeom>
+            <a:solidFill>
+              <a:schemeClr val="accent2"/>
+            </a:solidFill>
+            <a:ln>
+              <a:noFill/>
+            </a:ln>
+            <a:effectLst/>
+          </p:spPr>
+          <p:style>
+            <a:lnRef idx="1">
+              <a:schemeClr val="accent1"/>
+            </a:lnRef>
+            <a:fillRef idx="3">
+              <a:schemeClr val="accent1"/>
+            </a:fillRef>
+            <a:effectRef idx="2">
+              <a:schemeClr val="accent1"/>
+            </a:effectRef>
+            <a:fontRef idx="minor">
+              <a:schemeClr val="lt1"/>
+            </a:fontRef>
+          </p:style>
+          <p:txBody>
+            <a:bodyPr/>
+            <a:lstStyle/>
+            <a:p>
+              <a:endParaRPr lang="en-US"/>
+            </a:p>
+          </p:txBody>
+        </p:sp>
+      </p:grpSp>
       <p:sp>
         <p:nvSpPr>
           <p:cNvPr id="3" name="Content Placeholder 2">
             <a:extLst>
               <a:ext uri="{FF2B5EF4-FFF2-40B4-BE49-F238E27FC236}">
-                <a16:creationId xmlns:a16="http://schemas.microsoft.com/office/drawing/2014/main" id="{AEC5DC07-2922-A42A-03FC-675CB30C6131}"/>
+                <a16:creationId xmlns:a16="http://schemas.microsoft.com/office/drawing/2014/main" id="{A613B002-0064-97A2-C3E4-BD1952114BF4}"/>
               </a:ext>
             </a:extLst>
           </p:cNvPr>
@@ -9058,21 +9826,79 @@
             <p:ph idx="1"/>
           </p:nvPr>
         </p:nvSpPr>
-        <p:spPr/>
+        <p:spPr>
+          <a:xfrm>
+            <a:off x="764110" y="2052084"/>
+            <a:ext cx="3033249" cy="3856229"/>
+          </a:xfrm>
+        </p:spPr>
         <p:txBody>
-          <a:bodyPr/>
+          <a:bodyPr anchor="t">
+            <a:normAutofit/>
+          </a:bodyPr>
           <a:lstStyle/>
           <a:p>
-            <a:endParaRPr lang="en-US"/>
+            <a:r>
+              <a:rPr lang="en-US" sz="1600" dirty="0" err="1">
+                <a:solidFill>
+                  <a:srgbClr val="FFFFFF"/>
+                </a:solidFill>
+              </a:rPr>
+              <a:t>WiTRACK</a:t>
+            </a:r>
+            <a:r>
+              <a:rPr lang="en-US" sz="1600" dirty="0">
+                <a:solidFill>
+                  <a:srgbClr val="FFFFFF"/>
+                </a:solidFill>
+              </a:rPr>
+              <a:t> wind footprints</a:t>
+            </a:r>
+          </a:p>
+          <a:p>
+            <a:r>
+              <a:rPr lang="en-US" sz="1600" dirty="0">
+                <a:solidFill>
+                  <a:srgbClr val="FFFFFF"/>
+                </a:solidFill>
+              </a:rPr>
+              <a:t>IMERG </a:t>
+            </a:r>
+            <a:r>
+              <a:rPr lang="en-US" sz="1600" dirty="0" err="1">
+                <a:solidFill>
+                  <a:srgbClr val="FFFFFF"/>
+                </a:solidFill>
+              </a:rPr>
+              <a:t>precip</a:t>
+            </a:r>
+            <a:r>
+              <a:rPr lang="en-US" sz="1600" dirty="0">
+                <a:solidFill>
+                  <a:srgbClr val="FFFFFF"/>
+                </a:solidFill>
+              </a:rPr>
+              <a:t> attributes</a:t>
+            </a:r>
+          </a:p>
+          <a:p>
+            <a:r>
+              <a:rPr lang="en-US" sz="1600" dirty="0">
+                <a:solidFill>
+                  <a:srgbClr val="FFFFFF"/>
+                </a:solidFill>
+              </a:rPr>
+              <a:t>Storm surge observations</a:t>
+            </a:r>
           </a:p>
         </p:txBody>
       </p:sp>
       <p:pic>
         <p:nvPicPr>
-          <p:cNvPr id="4" name="Picture 3" descr="A screenshot of a map&#10;&#10;AI-generated content may be incorrect.">
+          <p:cNvPr id="4" name="Picture 3">
             <a:extLst>
               <a:ext uri="{FF2B5EF4-FFF2-40B4-BE49-F238E27FC236}">
-                <a16:creationId xmlns:a16="http://schemas.microsoft.com/office/drawing/2014/main" id="{F79E578A-19B1-C0A5-8BEA-AC1F23BBD73F}"/>
+                <a16:creationId xmlns:a16="http://schemas.microsoft.com/office/drawing/2014/main" id="{7568F9B9-2AD6-F9C6-7308-B3757C19595C}"/>
               </a:ext>
             </a:extLst>
           </p:cNvPr>
@@ -9082,82 +9908,30 @@
           <p:nvPr/>
         </p:nvPicPr>
         <p:blipFill>
-          <a:blip r:embed="rId2">
-            <a:extLst>
-              <a:ext uri="{28A0092B-C50C-407E-A947-70E740481C1C}">
-                <a14:useLocalDpi xmlns:a14="http://schemas.microsoft.com/office/drawing/2010/main" val="0"/>
-              </a:ext>
-            </a:extLst>
-          </a:blip>
-          <a:srcRect/>
+          <a:blip r:embed="rId2"/>
           <a:stretch>
             <a:fillRect/>
           </a:stretch>
         </p:blipFill>
-        <p:spPr bwMode="auto">
+        <p:spPr>
           <a:xfrm>
-            <a:off x="0" y="1873885"/>
-            <a:ext cx="5731510" cy="4618990"/>
+            <a:off x="4568800" y="2235307"/>
+            <a:ext cx="6866506" cy="2386111"/>
           </a:xfrm>
           <a:prstGeom prst="rect">
             <a:avLst/>
           </a:prstGeom>
-          <a:noFill/>
-          <a:ln>
-            <a:noFill/>
-          </a:ln>
-        </p:spPr>
-      </p:pic>
-      <p:pic>
-        <p:nvPicPr>
-          <p:cNvPr id="5" name="Picture 4" descr="A screenshot of a map&#10;&#10;AI-generated content may be incorrect.">
-            <a:extLst>
-              <a:ext uri="{FF2B5EF4-FFF2-40B4-BE49-F238E27FC236}">
-                <a16:creationId xmlns:a16="http://schemas.microsoft.com/office/drawing/2014/main" id="{2B861935-EAD6-B386-E868-93ECC5C6768B}"/>
-              </a:ext>
-            </a:extLst>
-          </p:cNvPr>
-          <p:cNvPicPr>
-            <a:picLocks noChangeAspect="1"/>
-          </p:cNvPicPr>
-          <p:nvPr/>
-        </p:nvPicPr>
-        <p:blipFill>
-          <a:blip r:embed="rId3">
-            <a:extLst>
-              <a:ext uri="{28A0092B-C50C-407E-A947-70E740481C1C}">
-                <a14:useLocalDpi xmlns:a14="http://schemas.microsoft.com/office/drawing/2010/main" val="0"/>
-              </a:ext>
-            </a:extLst>
-          </a:blip>
-          <a:srcRect/>
-          <a:stretch>
-            <a:fillRect/>
-          </a:stretch>
-        </p:blipFill>
-        <p:spPr bwMode="auto">
-          <a:xfrm>
-            <a:off x="5731510" y="2242335"/>
-            <a:ext cx="6326378" cy="3753352"/>
-          </a:xfrm>
-          <a:prstGeom prst="rect">
-            <a:avLst/>
-          </a:prstGeom>
-          <a:noFill/>
-          <a:ln>
-            <a:noFill/>
-          </a:ln>
         </p:spPr>
       </p:pic>
     </p:spTree>
     <p:extLst>
       <p:ext uri="{BB962C8B-B14F-4D97-AF65-F5344CB8AC3E}">
-        <p14:creationId xmlns:p14="http://schemas.microsoft.com/office/powerpoint/2010/main" val="3117455170"/>
+        <p14:creationId xmlns:p14="http://schemas.microsoft.com/office/powerpoint/2010/main" val="92772833"/>
       </p:ext>
     </p:extLst>
   </p:cSld>
   <p:clrMapOvr>
-    <a:masterClrMapping/>
+    <a:overrideClrMapping bg1="dk1" tx1="lt1" bg2="dk2" tx2="lt2" accent1="accent1" accent2="accent2" accent3="accent3" accent4="accent4" accent5="accent5" accent6="accent6" hlink="hlink" folHlink="folHlink"/>
   </p:clrMapOvr>
 </p:sld>
 </file>
@@ -9434,6 +10208,104 @@
           <p:cNvPr id="2" name="Title 1">
             <a:extLst>
               <a:ext uri="{FF2B5EF4-FFF2-40B4-BE49-F238E27FC236}">
+                <a16:creationId xmlns:a16="http://schemas.microsoft.com/office/drawing/2014/main" id="{7C34E8F0-6980-E4CF-DA99-9EF8B956DDE7}"/>
+              </a:ext>
+            </a:extLst>
+          </p:cNvPr>
+          <p:cNvSpPr>
+            <a:spLocks noGrp="1"/>
+          </p:cNvSpPr>
+          <p:nvPr>
+            <p:ph type="title"/>
+          </p:nvPr>
+        </p:nvSpPr>
+        <p:spPr/>
+        <p:txBody>
+          <a:bodyPr/>
+          <a:lstStyle/>
+          <a:p>
+            <a:r>
+              <a:rPr lang="en-US" dirty="0"/>
+              <a:t>1. Extended </a:t>
+            </a:r>
+            <a:r>
+              <a:rPr lang="en-US" dirty="0" err="1"/>
+              <a:t>IBTrACS</a:t>
+            </a:r>
+            <a:r>
+              <a:rPr lang="en-US" dirty="0"/>
+              <a:t>’ TRACKS</a:t>
+            </a:r>
+          </a:p>
+        </p:txBody>
+      </p:sp>
+      <p:sp>
+        <p:nvSpPr>
+          <p:cNvPr id="3" name="Text Placeholder 2">
+            <a:extLst>
+              <a:ext uri="{FF2B5EF4-FFF2-40B4-BE49-F238E27FC236}">
+                <a16:creationId xmlns:a16="http://schemas.microsoft.com/office/drawing/2014/main" id="{63639AE6-404C-3B7C-4214-6B120E1FF752}"/>
+              </a:ext>
+            </a:extLst>
+          </p:cNvPr>
+          <p:cNvSpPr>
+            <a:spLocks noGrp="1"/>
+          </p:cNvSpPr>
+          <p:nvPr>
+            <p:ph type="body" idx="1"/>
+          </p:nvPr>
+        </p:nvSpPr>
+        <p:spPr/>
+        <p:txBody>
+          <a:bodyPr/>
+          <a:lstStyle/>
+          <a:p>
+            <a:r>
+              <a:rPr lang="en-US" dirty="0" err="1"/>
+              <a:t>espECIALLY</a:t>
+            </a:r>
+            <a:r>
+              <a:rPr lang="en-US" dirty="0"/>
+              <a:t> in the mid-latitudes</a:t>
+            </a:r>
+          </a:p>
+        </p:txBody>
+      </p:sp>
+    </p:spTree>
+    <p:extLst>
+      <p:ext uri="{BB962C8B-B14F-4D97-AF65-F5344CB8AC3E}">
+        <p14:creationId xmlns:p14="http://schemas.microsoft.com/office/powerpoint/2010/main" val="1991708256"/>
+      </p:ext>
+    </p:extLst>
+  </p:cSld>
+  <p:clrMapOvr>
+    <a:masterClrMapping/>
+  </p:clrMapOvr>
+</p:sld>
+</file>
+
+<file path=ppt/slides/slide5.xml><?xml version="1.0" encoding="utf-8"?>
+<p:sld xmlns:a="http://schemas.openxmlformats.org/drawingml/2006/main" xmlns:r="http://schemas.openxmlformats.org/officeDocument/2006/relationships" xmlns:p="http://schemas.openxmlformats.org/presentationml/2006/main">
+  <p:cSld>
+    <p:spTree>
+      <p:nvGrpSpPr>
+        <p:cNvPr id="1" name=""/>
+        <p:cNvGrpSpPr/>
+        <p:nvPr/>
+      </p:nvGrpSpPr>
+      <p:grpSpPr>
+        <a:xfrm>
+          <a:off x="0" y="0"/>
+          <a:ext cx="0" cy="0"/>
+          <a:chOff x="0" y="0"/>
+          <a:chExt cx="0" cy="0"/>
+        </a:xfrm>
+      </p:grpSpPr>
+      <p:sp>
+        <p:nvSpPr>
+          <p:cNvPr id="2" name="Title 1">
+            <a:extLst>
+              <a:ext uri="{FF2B5EF4-FFF2-40B4-BE49-F238E27FC236}">
                 <a16:creationId xmlns:a16="http://schemas.microsoft.com/office/drawing/2014/main" id="{9DF48551-039A-6C72-9CF0-AABA998872D9}"/>
               </a:ext>
             </a:extLst>
@@ -9643,7 +10515,7 @@
 </p:sld>
 </file>
 
-<file path=ppt/slides/slide5.xml><?xml version="1.0" encoding="utf-8"?>
+<file path=ppt/slides/slide6.xml><?xml version="1.0" encoding="utf-8"?>
 <p:sld xmlns:a="http://schemas.openxmlformats.org/drawingml/2006/main" xmlns:r="http://schemas.openxmlformats.org/officeDocument/2006/relationships" xmlns:p="http://schemas.openxmlformats.org/presentationml/2006/main">
   <p:cSld>
     <p:spTree>
@@ -9888,7 +10760,7 @@
 </p:sld>
 </file>
 
-<file path=ppt/slides/slide6.xml><?xml version="1.0" encoding="utf-8"?>
+<file path=ppt/slides/slide7.xml><?xml version="1.0" encoding="utf-8"?>
 <p:sld xmlns:a="http://schemas.openxmlformats.org/drawingml/2006/main" xmlns:r="http://schemas.openxmlformats.org/officeDocument/2006/relationships" xmlns:p="http://schemas.openxmlformats.org/presentationml/2006/main">
   <p:cSld>
     <p:spTree>
@@ -10140,7 +11012,7 @@
 </p:sld>
 </file>
 
-<file path=ppt/slides/slide7.xml><?xml version="1.0" encoding="utf-8"?>
+<file path=ppt/slides/slide8.xml><?xml version="1.0" encoding="utf-8"?>
 <p:sld xmlns:a="http://schemas.openxmlformats.org/drawingml/2006/main" xmlns:r="http://schemas.openxmlformats.org/officeDocument/2006/relationships" xmlns:p="http://schemas.openxmlformats.org/presentationml/2006/main">
   <p:cSld>
     <p:spTree>
@@ -10339,7 +11211,7 @@
 </p:sld>
 </file>
 
-<file path=ppt/slides/slide8.xml><?xml version="1.0" encoding="utf-8"?>
+<file path=ppt/slides/slide9.xml><?xml version="1.0" encoding="utf-8"?>
 <p:sld xmlns:a="http://schemas.openxmlformats.org/drawingml/2006/main" xmlns:r="http://schemas.openxmlformats.org/officeDocument/2006/relationships" xmlns:p="http://schemas.openxmlformats.org/presentationml/2006/main">
   <p:cSld>
     <p:spTree>
@@ -10528,509 +11400,6 @@
     <p:extLst>
       <p:ext uri="{BB962C8B-B14F-4D97-AF65-F5344CB8AC3E}">
         <p14:creationId xmlns:p14="http://schemas.microsoft.com/office/powerpoint/2010/main" val="1960671551"/>
-      </p:ext>
-    </p:extLst>
-  </p:cSld>
-  <p:clrMapOvr>
-    <a:masterClrMapping/>
-  </p:clrMapOvr>
-</p:sld>
-</file>
-
-<file path=ppt/slides/slide9.xml><?xml version="1.0" encoding="utf-8"?>
-<p:sld xmlns:a="http://schemas.openxmlformats.org/drawingml/2006/main" xmlns:r="http://schemas.openxmlformats.org/officeDocument/2006/relationships" xmlns:p="http://schemas.openxmlformats.org/presentationml/2006/main">
-  <p:cSld>
-    <p:spTree>
-      <p:nvGrpSpPr>
-        <p:cNvPr id="1" name=""/>
-        <p:cNvGrpSpPr/>
-        <p:nvPr/>
-      </p:nvGrpSpPr>
-      <p:grpSpPr>
-        <a:xfrm>
-          <a:off x="0" y="0"/>
-          <a:ext cx="0" cy="0"/>
-          <a:chOff x="0" y="0"/>
-          <a:chExt cx="0" cy="0"/>
-        </a:xfrm>
-      </p:grpSpPr>
-      <p:pic>
-        <p:nvPicPr>
-          <p:cNvPr id="3" name="Picture 2">
-            <a:extLst>
-              <a:ext uri="{FF2B5EF4-FFF2-40B4-BE49-F238E27FC236}">
-                <a16:creationId xmlns:a16="http://schemas.microsoft.com/office/drawing/2014/main" id="{BF733BF0-81EB-B0F6-5348-9712EEF8CA00}"/>
-              </a:ext>
-            </a:extLst>
-          </p:cNvPr>
-          <p:cNvPicPr>
-            <a:picLocks noChangeAspect="1"/>
-          </p:cNvPicPr>
-          <p:nvPr/>
-        </p:nvPicPr>
-        <p:blipFill>
-          <a:blip r:embed="rId2"/>
-          <a:srcRect l="37255" t="20172" b="2646"/>
-          <a:stretch/>
-        </p:blipFill>
-        <p:spPr>
-          <a:xfrm>
-            <a:off x="4713666" y="664029"/>
-            <a:ext cx="7330604" cy="5828846"/>
-          </a:xfrm>
-          <a:prstGeom prst="rect">
-            <a:avLst/>
-          </a:prstGeom>
-        </p:spPr>
-      </p:pic>
-      <p:sp>
-        <p:nvSpPr>
-          <p:cNvPr id="2" name="Title 1">
-            <a:extLst>
-              <a:ext uri="{FF2B5EF4-FFF2-40B4-BE49-F238E27FC236}">
-                <a16:creationId xmlns:a16="http://schemas.microsoft.com/office/drawing/2014/main" id="{64D9DD38-64F3-E74E-0727-E0E15CB3E85D}"/>
-              </a:ext>
-            </a:extLst>
-          </p:cNvPr>
-          <p:cNvSpPr>
-            <a:spLocks noGrp="1"/>
-          </p:cNvSpPr>
-          <p:nvPr>
-            <p:ph type="title"/>
-          </p:nvPr>
-        </p:nvSpPr>
-        <p:spPr>
-          <a:xfrm>
-            <a:off x="838200" y="365125"/>
-            <a:ext cx="2928257" cy="1325563"/>
-          </a:xfrm>
-        </p:spPr>
-        <p:txBody>
-          <a:bodyPr/>
-          <a:lstStyle/>
-          <a:p>
-            <a:r>
-              <a:rPr lang="en-US" dirty="0"/>
-              <a:t>Example</a:t>
-            </a:r>
-          </a:p>
-        </p:txBody>
-      </p:sp>
-      <p:sp>
-        <p:nvSpPr>
-          <p:cNvPr id="5" name="TextBox 4">
-            <a:extLst>
-              <a:ext uri="{FF2B5EF4-FFF2-40B4-BE49-F238E27FC236}">
-                <a16:creationId xmlns:a16="http://schemas.microsoft.com/office/drawing/2014/main" id="{AE09DB65-1949-0733-B3E3-5DD7556C3AD0}"/>
-              </a:ext>
-            </a:extLst>
-          </p:cNvPr>
-          <p:cNvSpPr txBox="1"/>
-          <p:nvPr/>
-        </p:nvSpPr>
-        <p:spPr>
-          <a:xfrm>
-            <a:off x="5867400" y="27668"/>
-            <a:ext cx="5279572" cy="369332"/>
-          </a:xfrm>
-          <a:prstGeom prst="rect">
-            <a:avLst/>
-          </a:prstGeom>
-          <a:noFill/>
-        </p:spPr>
-        <p:txBody>
-          <a:bodyPr wrap="square" rtlCol="0">
-            <a:spAutoFit/>
-          </a:bodyPr>
-          <a:lstStyle/>
-          <a:p>
-            <a:r>
-              <a:rPr lang="en-US" dirty="0"/>
-              <a:t>1. Record represents time step in the track</a:t>
-            </a:r>
-          </a:p>
-        </p:txBody>
-      </p:sp>
-      <p:cxnSp>
-        <p:nvCxnSpPr>
-          <p:cNvPr id="7" name="Straight Arrow Connector 6">
-            <a:extLst>
-              <a:ext uri="{FF2B5EF4-FFF2-40B4-BE49-F238E27FC236}">
-                <a16:creationId xmlns:a16="http://schemas.microsoft.com/office/drawing/2014/main" id="{E4D8EB0D-BE8F-225D-B287-6EE02F0BCD54}"/>
-              </a:ext>
-            </a:extLst>
-          </p:cNvPr>
-          <p:cNvCxnSpPr/>
-          <p:nvPr/>
-        </p:nvCxnSpPr>
-        <p:spPr>
-          <a:xfrm flipH="1">
-            <a:off x="5225143" y="239486"/>
-            <a:ext cx="500743" cy="424543"/>
-          </a:xfrm>
-          <a:prstGeom prst="straightConnector1">
-            <a:avLst/>
-          </a:prstGeom>
-          <a:ln>
-            <a:tailEnd type="triangle"/>
-          </a:ln>
-        </p:spPr>
-        <p:style>
-          <a:lnRef idx="3">
-            <a:schemeClr val="accent2"/>
-          </a:lnRef>
-          <a:fillRef idx="0">
-            <a:schemeClr val="accent2"/>
-          </a:fillRef>
-          <a:effectRef idx="2">
-            <a:schemeClr val="accent2"/>
-          </a:effectRef>
-          <a:fontRef idx="minor">
-            <a:schemeClr val="tx1"/>
-          </a:fontRef>
-        </p:style>
-      </p:cxnSp>
-      <p:cxnSp>
-        <p:nvCxnSpPr>
-          <p:cNvPr id="8" name="Straight Arrow Connector 7">
-            <a:extLst>
-              <a:ext uri="{FF2B5EF4-FFF2-40B4-BE49-F238E27FC236}">
-                <a16:creationId xmlns:a16="http://schemas.microsoft.com/office/drawing/2014/main" id="{A71BE55D-6F3E-CDD6-377F-048ECD132C6C}"/>
-              </a:ext>
-            </a:extLst>
-          </p:cNvPr>
-          <p:cNvCxnSpPr>
-            <a:cxnSpLocks/>
-          </p:cNvCxnSpPr>
-          <p:nvPr/>
-        </p:nvCxnSpPr>
-        <p:spPr>
-          <a:xfrm>
-            <a:off x="10254953" y="245889"/>
-            <a:ext cx="666572" cy="376189"/>
-          </a:xfrm>
-          <a:prstGeom prst="straightConnector1">
-            <a:avLst/>
-          </a:prstGeom>
-          <a:ln>
-            <a:tailEnd type="triangle"/>
-          </a:ln>
-        </p:spPr>
-        <p:style>
-          <a:lnRef idx="3">
-            <a:schemeClr val="accent2"/>
-          </a:lnRef>
-          <a:fillRef idx="0">
-            <a:schemeClr val="accent2"/>
-          </a:fillRef>
-          <a:effectRef idx="2">
-            <a:schemeClr val="accent2"/>
-          </a:effectRef>
-          <a:fontRef idx="minor">
-            <a:schemeClr val="tx1"/>
-          </a:fontRef>
-        </p:style>
-      </p:cxnSp>
-      <p:sp>
-        <p:nvSpPr>
-          <p:cNvPr id="10" name="TextBox 9">
-            <a:extLst>
-              <a:ext uri="{FF2B5EF4-FFF2-40B4-BE49-F238E27FC236}">
-                <a16:creationId xmlns:a16="http://schemas.microsoft.com/office/drawing/2014/main" id="{C7639780-DA6D-ADA7-074D-994048E6D49B}"/>
-              </a:ext>
-            </a:extLst>
-          </p:cNvPr>
-          <p:cNvSpPr txBox="1"/>
-          <p:nvPr/>
-        </p:nvSpPr>
-        <p:spPr>
-          <a:xfrm>
-            <a:off x="82865" y="1740998"/>
-            <a:ext cx="3058682" cy="1200329"/>
-          </a:xfrm>
-          <a:prstGeom prst="rect">
-            <a:avLst/>
-          </a:prstGeom>
-          <a:noFill/>
-        </p:spPr>
-        <p:txBody>
-          <a:bodyPr wrap="square" rtlCol="0">
-            <a:spAutoFit/>
-          </a:bodyPr>
-          <a:lstStyle/>
-          <a:p>
-            <a:r>
-              <a:rPr lang="en-US" dirty="0"/>
-              <a:t>2. For a given record/time step, data is provided for each dataset that has a matching track at this time</a:t>
-            </a:r>
-          </a:p>
-        </p:txBody>
-      </p:sp>
-      <p:sp>
-        <p:nvSpPr>
-          <p:cNvPr id="12" name="Left Brace 11">
-            <a:extLst>
-              <a:ext uri="{FF2B5EF4-FFF2-40B4-BE49-F238E27FC236}">
-                <a16:creationId xmlns:a16="http://schemas.microsoft.com/office/drawing/2014/main" id="{804287AF-C171-7B92-2D05-488A8B10E3C0}"/>
-              </a:ext>
-            </a:extLst>
-          </p:cNvPr>
-          <p:cNvSpPr/>
-          <p:nvPr/>
-        </p:nvSpPr>
-        <p:spPr>
-          <a:xfrm>
-            <a:off x="4646369" y="1049898"/>
-            <a:ext cx="578774" cy="1401510"/>
-          </a:xfrm>
-          <a:prstGeom prst="leftBrace">
-            <a:avLst/>
-          </a:prstGeom>
-        </p:spPr>
-        <p:style>
-          <a:lnRef idx="3">
-            <a:schemeClr val="accent2"/>
-          </a:lnRef>
-          <a:fillRef idx="0">
-            <a:schemeClr val="accent2"/>
-          </a:fillRef>
-          <a:effectRef idx="2">
-            <a:schemeClr val="accent2"/>
-          </a:effectRef>
-          <a:fontRef idx="minor">
-            <a:schemeClr val="tx1"/>
-          </a:fontRef>
-        </p:style>
-        <p:txBody>
-          <a:bodyPr rtlCol="0" anchor="ctr"/>
-          <a:lstStyle/>
-          <a:p>
-            <a:pPr algn="ctr"/>
-            <a:endParaRPr lang="en-US"/>
-          </a:p>
-        </p:txBody>
-      </p:sp>
-      <p:sp>
-        <p:nvSpPr>
-          <p:cNvPr id="13" name="TextBox 12">
-            <a:extLst>
-              <a:ext uri="{FF2B5EF4-FFF2-40B4-BE49-F238E27FC236}">
-                <a16:creationId xmlns:a16="http://schemas.microsoft.com/office/drawing/2014/main" id="{A26CA58C-9AB4-75AC-4D65-466B4D1523C5}"/>
-              </a:ext>
-            </a:extLst>
-          </p:cNvPr>
-          <p:cNvSpPr txBox="1"/>
-          <p:nvPr/>
-        </p:nvSpPr>
-        <p:spPr>
-          <a:xfrm>
-            <a:off x="3492129" y="1489043"/>
-            <a:ext cx="1058660" cy="523220"/>
-          </a:xfrm>
-          <a:prstGeom prst="rect">
-            <a:avLst/>
-          </a:prstGeom>
-        </p:spPr>
-        <p:style>
-          <a:lnRef idx="2">
-            <a:schemeClr val="dk1"/>
-          </a:lnRef>
-          <a:fillRef idx="1">
-            <a:schemeClr val="lt1"/>
-          </a:fillRef>
-          <a:effectRef idx="0">
-            <a:schemeClr val="dk1"/>
-          </a:effectRef>
-          <a:fontRef idx="minor">
-            <a:schemeClr val="dk1"/>
-          </a:fontRef>
-        </p:style>
-        <p:txBody>
-          <a:bodyPr wrap="square" rtlCol="0">
-            <a:spAutoFit/>
-          </a:bodyPr>
-          <a:lstStyle/>
-          <a:p>
-            <a:pPr algn="r"/>
-            <a:r>
-              <a:rPr lang="en-US" sz="1400" dirty="0"/>
-              <a:t>Matching data</a:t>
-            </a:r>
-          </a:p>
-        </p:txBody>
-      </p:sp>
-      <p:cxnSp>
-        <p:nvCxnSpPr>
-          <p:cNvPr id="15" name="Straight Arrow Connector 14">
-            <a:extLst>
-              <a:ext uri="{FF2B5EF4-FFF2-40B4-BE49-F238E27FC236}">
-                <a16:creationId xmlns:a16="http://schemas.microsoft.com/office/drawing/2014/main" id="{F92F2BB4-266A-3C5D-E86B-B08F58A027EC}"/>
-              </a:ext>
-            </a:extLst>
-          </p:cNvPr>
-          <p:cNvCxnSpPr>
-            <a:cxnSpLocks/>
-          </p:cNvCxnSpPr>
-          <p:nvPr/>
-        </p:nvCxnSpPr>
-        <p:spPr>
-          <a:xfrm>
-            <a:off x="4616256" y="2713018"/>
-            <a:ext cx="608887" cy="0"/>
-          </a:xfrm>
-          <a:prstGeom prst="straightConnector1">
-            <a:avLst/>
-          </a:prstGeom>
-          <a:ln>
-            <a:tailEnd type="triangle"/>
-          </a:ln>
-        </p:spPr>
-        <p:style>
-          <a:lnRef idx="3">
-            <a:schemeClr val="accent2"/>
-          </a:lnRef>
-          <a:fillRef idx="0">
-            <a:schemeClr val="accent2"/>
-          </a:fillRef>
-          <a:effectRef idx="2">
-            <a:schemeClr val="accent2"/>
-          </a:effectRef>
-          <a:fontRef idx="minor">
-            <a:schemeClr val="tx1"/>
-          </a:fontRef>
-        </p:style>
-      </p:cxnSp>
-      <p:sp>
-        <p:nvSpPr>
-          <p:cNvPr id="18" name="TextBox 17">
-            <a:extLst>
-              <a:ext uri="{FF2B5EF4-FFF2-40B4-BE49-F238E27FC236}">
-                <a16:creationId xmlns:a16="http://schemas.microsoft.com/office/drawing/2014/main" id="{6290A05A-21D2-65A9-F5DB-080466994F23}"/>
-              </a:ext>
-            </a:extLst>
-          </p:cNvPr>
-          <p:cNvSpPr txBox="1"/>
-          <p:nvPr/>
-        </p:nvSpPr>
-        <p:spPr>
-          <a:xfrm>
-            <a:off x="2924671" y="2451408"/>
-            <a:ext cx="1673908" cy="523220"/>
-          </a:xfrm>
-          <a:prstGeom prst="rect">
-            <a:avLst/>
-          </a:prstGeom>
-        </p:spPr>
-        <p:style>
-          <a:lnRef idx="2">
-            <a:schemeClr val="dk1"/>
-          </a:lnRef>
-          <a:fillRef idx="1">
-            <a:schemeClr val="lt1"/>
-          </a:fillRef>
-          <a:effectRef idx="0">
-            <a:schemeClr val="dk1"/>
-          </a:effectRef>
-          <a:fontRef idx="minor">
-            <a:schemeClr val="dk1"/>
-          </a:fontRef>
-        </p:style>
-        <p:txBody>
-          <a:bodyPr wrap="square" rtlCol="0">
-            <a:spAutoFit/>
-          </a:bodyPr>
-          <a:lstStyle/>
-          <a:p>
-            <a:pPr algn="r"/>
-            <a:r>
-              <a:rPr lang="en-US" sz="1400" dirty="0"/>
-              <a:t>No match with this dataset at this time</a:t>
-            </a:r>
-          </a:p>
-        </p:txBody>
-      </p:sp>
-      <p:sp>
-        <p:nvSpPr>
-          <p:cNvPr id="19" name="TextBox 18">
-            <a:extLst>
-              <a:ext uri="{FF2B5EF4-FFF2-40B4-BE49-F238E27FC236}">
-                <a16:creationId xmlns:a16="http://schemas.microsoft.com/office/drawing/2014/main" id="{899AF722-0463-0F3E-C8C7-ADACC02295E6}"/>
-              </a:ext>
-            </a:extLst>
-          </p:cNvPr>
-          <p:cNvSpPr txBox="1"/>
-          <p:nvPr/>
-        </p:nvSpPr>
-        <p:spPr>
-          <a:xfrm>
-            <a:off x="82865" y="3266200"/>
-            <a:ext cx="3058682" cy="1477328"/>
-          </a:xfrm>
-          <a:prstGeom prst="rect">
-            <a:avLst/>
-          </a:prstGeom>
-          <a:noFill/>
-        </p:spPr>
-        <p:txBody>
-          <a:bodyPr wrap="square" rtlCol="0">
-            <a:spAutoFit/>
-          </a:bodyPr>
-          <a:lstStyle/>
-          <a:p>
-            <a:r>
-              <a:rPr lang="en-US" dirty="0"/>
-              <a:t>3. For matching points, longitude and latitude of the (re)analysis cyclone center (as defined by the tracker) is provided + intensity.</a:t>
-            </a:r>
-          </a:p>
-        </p:txBody>
-      </p:sp>
-      <p:sp>
-        <p:nvSpPr>
-          <p:cNvPr id="20" name="TextBox 19">
-            <a:extLst>
-              <a:ext uri="{FF2B5EF4-FFF2-40B4-BE49-F238E27FC236}">
-                <a16:creationId xmlns:a16="http://schemas.microsoft.com/office/drawing/2014/main" id="{082987CA-4F88-1963-F69C-7F7A1C3409B8}"/>
-              </a:ext>
-            </a:extLst>
-          </p:cNvPr>
-          <p:cNvSpPr txBox="1"/>
-          <p:nvPr/>
-        </p:nvSpPr>
-        <p:spPr>
-          <a:xfrm>
-            <a:off x="82865" y="5015547"/>
-            <a:ext cx="3058682" cy="1477328"/>
-          </a:xfrm>
-          <a:prstGeom prst="rect">
-            <a:avLst/>
-          </a:prstGeom>
-          <a:noFill/>
-        </p:spPr>
-        <p:txBody>
-          <a:bodyPr wrap="square" rtlCol="0">
-            <a:spAutoFit/>
-          </a:bodyPr>
-          <a:lstStyle/>
-          <a:p>
-            <a:r>
-              <a:rPr lang="en-US" dirty="0"/>
-              <a:t>NB: Some products only provided 6-hourly data while </a:t>
-            </a:r>
-            <a:r>
-              <a:rPr lang="en-US" dirty="0" err="1"/>
-              <a:t>IBTrACS</a:t>
-            </a:r>
-            <a:r>
-              <a:rPr lang="en-US" dirty="0"/>
-              <a:t> is 3-hourly, hence there might be “gaps” for a given (re)analysis track.</a:t>
-            </a:r>
-          </a:p>
-        </p:txBody>
-      </p:sp>
-    </p:spTree>
-    <p:extLst>
-      <p:ext uri="{BB962C8B-B14F-4D97-AF65-F5344CB8AC3E}">
-        <p14:creationId xmlns:p14="http://schemas.microsoft.com/office/powerpoint/2010/main" val="4108434403"/>
       </p:ext>
     </p:extLst>
   </p:cSld>
